--- a/apresentacao_design_inibidores.pptx
+++ b/apresentacao_design_inibidores.pptx
@@ -5,28 +5,31 @@
     <p:sldMasterId id="2147483648" r:id="rId1"/>
   </p:sldMasterIdLst>
   <p:sldIdLst>
-    <p:sldId id="256" r:id="rId7"/>
-    <p:sldId id="257" r:id="rId8"/>
-    <p:sldId id="258" r:id="rId9"/>
-    <p:sldId id="259" r:id="rId10"/>
-    <p:sldId id="260" r:id="rId11"/>
-    <p:sldId id="261" r:id="rId12"/>
-    <p:sldId id="262" r:id="rId13"/>
-    <p:sldId id="263" r:id="rId14"/>
-    <p:sldId id="264" r:id="rId15"/>
-    <p:sldId id="265" r:id="rId16"/>
-    <p:sldId id="266" r:id="rId17"/>
-    <p:sldId id="267" r:id="rId18"/>
-    <p:sldId id="268" r:id="rId19"/>
-    <p:sldId id="269" r:id="rId20"/>
-    <p:sldId id="270" r:id="rId21"/>
-    <p:sldId id="271" r:id="rId22"/>
-    <p:sldId id="272" r:id="rId23"/>
-    <p:sldId id="273" r:id="rId24"/>
-    <p:sldId id="274" r:id="rId25"/>
-    <p:sldId id="275" r:id="rId26"/>
-    <p:sldId id="276" r:id="rId27"/>
-    <p:sldId id="277" r:id="rId28"/>
+    <p:sldId id="256" r:id="rId2"/>
+    <p:sldId id="257" r:id="rId3"/>
+    <p:sldId id="258" r:id="rId4"/>
+    <p:sldId id="259" r:id="rId5"/>
+    <p:sldId id="260" r:id="rId6"/>
+    <p:sldId id="261" r:id="rId7"/>
+    <p:sldId id="262" r:id="rId8"/>
+    <p:sldId id="263" r:id="rId9"/>
+    <p:sldId id="264" r:id="rId10"/>
+    <p:sldId id="265" r:id="rId11"/>
+    <p:sldId id="266" r:id="rId12"/>
+    <p:sldId id="267" r:id="rId13"/>
+    <p:sldId id="268" r:id="rId14"/>
+    <p:sldId id="269" r:id="rId15"/>
+    <p:sldId id="270" r:id="rId16"/>
+    <p:sldId id="271" r:id="rId17"/>
+    <p:sldId id="272" r:id="rId18"/>
+    <p:sldId id="273" r:id="rId19"/>
+    <p:sldId id="274" r:id="rId20"/>
+    <p:sldId id="275" r:id="rId21"/>
+    <p:sldId id="276" r:id="rId22"/>
+    <p:sldId id="277" r:id="rId23"/>
+    <p:sldId id="278" r:id="rId28"/>
+    <p:sldId id="279" r:id="rId29"/>
+    <p:sldId id="280" r:id="rId30"/>
   </p:sldIdLst>
   <p:sldSz cx="9144000" cy="6858000" type="screen4x3"/>
   <p:notesSz cx="6858000" cy="9144000"/>
@@ -125,6 +128,22 @@
       </a:defRPr>
     </a:lvl9pPr>
   </p:defaultTextStyle>
+  <p:extLst>
+    <p:ext uri="{EFAFB233-063F-42B5-8137-9DF3F51BA10A}">
+      <p15:sldGuideLst xmlns:p15="http://schemas.microsoft.com/office/powerpoint/2012/main">
+        <p15:guide id="1" orient="horz" pos="2160">
+          <p15:clr>
+            <a:srgbClr val="A4A3A4"/>
+          </p15:clr>
+        </p15:guide>
+        <p15:guide id="2" pos="2880">
+          <p15:clr>
+            <a:srgbClr val="A4A3A4"/>
+          </p15:clr>
+        </p15:guide>
+      </p15:sldGuideLst>
+    </p:ext>
+  </p:extLst>
 </p:presentation>
 </file>
 
@@ -166,10 +185,9 @@
           <a:lstStyle/>
           <a:p>
             <a:r>
-              <a:rPr lang="en-US" smtClean="0"/>
+              <a:rPr lang="en-US"/>
               <a:t>Click to edit Master title style</a:t>
             </a:r>
-            <a:endParaRPr lang="en-US"/>
           </a:p>
         </p:txBody>
       </p:sp>
@@ -285,10 +303,9 @@
           </a:lstStyle>
           <a:p>
             <a:r>
-              <a:rPr lang="en-US" smtClean="0"/>
+              <a:rPr lang="en-US"/>
               <a:t>Click to edit Master subtitle style</a:t>
             </a:r>
-            <a:endParaRPr lang="en-US"/>
           </a:p>
         </p:txBody>
       </p:sp>
@@ -309,7 +326,7 @@
           <a:p>
             <a:fld id="{5BCAD085-E8A6-8845-BD4E-CB4CCA059FC4}" type="datetimeFigureOut">
               <a:rPr lang="en-US" smtClean="0"/>
-              <a:t>1/27/13</a:t>
+              <a:t>7/21/2026</a:t>
             </a:fld>
             <a:endParaRPr lang="en-US"/>
           </a:p>
@@ -351,7 +368,7 @@
           <a:p>
             <a:fld id="{C1FF6DA9-008F-8B48-92A6-B652298478BF}" type="slidenum">
               <a:rPr lang="en-US" smtClean="0"/>
-              <a:t>‹#›</a:t>
+              <a:t>‹nº›</a:t>
             </a:fld>
             <a:endParaRPr lang="en-US"/>
           </a:p>
@@ -403,10 +420,9 @@
           <a:lstStyle/>
           <a:p>
             <a:r>
-              <a:rPr lang="en-US" smtClean="0"/>
+              <a:rPr lang="en-US"/>
               <a:t>Click to edit Master title style</a:t>
             </a:r>
-            <a:endParaRPr lang="en-US"/>
           </a:p>
         </p:txBody>
       </p:sp>
@@ -427,38 +443,37 @@
           <a:p>
             <a:pPr lvl="0"/>
             <a:r>
-              <a:rPr lang="en-US" smtClean="0"/>
+              <a:rPr lang="en-US"/>
               <a:t>Click to edit Master text styles</a:t>
             </a:r>
           </a:p>
           <a:p>
             <a:pPr lvl="1"/>
             <a:r>
-              <a:rPr lang="en-US" smtClean="0"/>
+              <a:rPr lang="en-US"/>
               <a:t>Second level</a:t>
             </a:r>
           </a:p>
           <a:p>
             <a:pPr lvl="2"/>
             <a:r>
-              <a:rPr lang="en-US" smtClean="0"/>
+              <a:rPr lang="en-US"/>
               <a:t>Third level</a:t>
             </a:r>
           </a:p>
           <a:p>
             <a:pPr lvl="3"/>
             <a:r>
-              <a:rPr lang="en-US" smtClean="0"/>
+              <a:rPr lang="en-US"/>
               <a:t>Fourth level</a:t>
             </a:r>
           </a:p>
           <a:p>
             <a:pPr lvl="4"/>
             <a:r>
-              <a:rPr lang="en-US" smtClean="0"/>
+              <a:rPr lang="en-US"/>
               <a:t>Fifth level</a:t>
             </a:r>
-            <a:endParaRPr lang="en-US"/>
           </a:p>
         </p:txBody>
       </p:sp>
@@ -479,7 +494,7 @@
           <a:p>
             <a:fld id="{5BCAD085-E8A6-8845-BD4E-CB4CCA059FC4}" type="datetimeFigureOut">
               <a:rPr lang="en-US" smtClean="0"/>
-              <a:t>1/27/13</a:t>
+              <a:t>7/21/2026</a:t>
             </a:fld>
             <a:endParaRPr lang="en-US"/>
           </a:p>
@@ -521,7 +536,7 @@
           <a:p>
             <a:fld id="{C1FF6DA9-008F-8B48-92A6-B652298478BF}" type="slidenum">
               <a:rPr lang="en-US" smtClean="0"/>
-              <a:t>‹#›</a:t>
+              <a:t>‹nº›</a:t>
             </a:fld>
             <a:endParaRPr lang="en-US"/>
           </a:p>
@@ -578,10 +593,9 @@
           <a:lstStyle/>
           <a:p>
             <a:r>
-              <a:rPr lang="en-US" smtClean="0"/>
+              <a:rPr lang="en-US"/>
               <a:t>Click to edit Master title style</a:t>
             </a:r>
-            <a:endParaRPr lang="en-US"/>
           </a:p>
         </p:txBody>
       </p:sp>
@@ -607,38 +621,37 @@
           <a:p>
             <a:pPr lvl="0"/>
             <a:r>
-              <a:rPr lang="en-US" smtClean="0"/>
+              <a:rPr lang="en-US"/>
               <a:t>Click to edit Master text styles</a:t>
             </a:r>
           </a:p>
           <a:p>
             <a:pPr lvl="1"/>
             <a:r>
-              <a:rPr lang="en-US" smtClean="0"/>
+              <a:rPr lang="en-US"/>
               <a:t>Second level</a:t>
             </a:r>
           </a:p>
           <a:p>
             <a:pPr lvl="2"/>
             <a:r>
-              <a:rPr lang="en-US" smtClean="0"/>
+              <a:rPr lang="en-US"/>
               <a:t>Third level</a:t>
             </a:r>
           </a:p>
           <a:p>
             <a:pPr lvl="3"/>
             <a:r>
-              <a:rPr lang="en-US" smtClean="0"/>
+              <a:rPr lang="en-US"/>
               <a:t>Fourth level</a:t>
             </a:r>
           </a:p>
           <a:p>
             <a:pPr lvl="4"/>
             <a:r>
-              <a:rPr lang="en-US" smtClean="0"/>
+              <a:rPr lang="en-US"/>
               <a:t>Fifth level</a:t>
             </a:r>
-            <a:endParaRPr lang="en-US"/>
           </a:p>
         </p:txBody>
       </p:sp>
@@ -659,7 +672,7 @@
           <a:p>
             <a:fld id="{5BCAD085-E8A6-8845-BD4E-CB4CCA059FC4}" type="datetimeFigureOut">
               <a:rPr lang="en-US" smtClean="0"/>
-              <a:t>1/27/13</a:t>
+              <a:t>7/21/2026</a:t>
             </a:fld>
             <a:endParaRPr lang="en-US"/>
           </a:p>
@@ -701,7 +714,7 @@
           <a:p>
             <a:fld id="{C1FF6DA9-008F-8B48-92A6-B652298478BF}" type="slidenum">
               <a:rPr lang="en-US" smtClean="0"/>
-              <a:t>‹#›</a:t>
+              <a:t>‹nº›</a:t>
             </a:fld>
             <a:endParaRPr lang="en-US"/>
           </a:p>
@@ -753,10 +766,9 @@
           <a:lstStyle/>
           <a:p>
             <a:r>
-              <a:rPr lang="en-US" smtClean="0"/>
+              <a:rPr lang="en-US"/>
               <a:t>Click to edit Master title style</a:t>
             </a:r>
-            <a:endParaRPr lang="en-US"/>
           </a:p>
         </p:txBody>
       </p:sp>
@@ -777,38 +789,37 @@
           <a:p>
             <a:pPr lvl="0"/>
             <a:r>
-              <a:rPr lang="en-US" smtClean="0"/>
+              <a:rPr lang="en-US"/>
               <a:t>Click to edit Master text styles</a:t>
             </a:r>
           </a:p>
           <a:p>
             <a:pPr lvl="1"/>
             <a:r>
-              <a:rPr lang="en-US" smtClean="0"/>
+              <a:rPr lang="en-US"/>
               <a:t>Second level</a:t>
             </a:r>
           </a:p>
           <a:p>
             <a:pPr lvl="2"/>
             <a:r>
-              <a:rPr lang="en-US" smtClean="0"/>
+              <a:rPr lang="en-US"/>
               <a:t>Third level</a:t>
             </a:r>
           </a:p>
           <a:p>
             <a:pPr lvl="3"/>
             <a:r>
-              <a:rPr lang="en-US" smtClean="0"/>
+              <a:rPr lang="en-US"/>
               <a:t>Fourth level</a:t>
             </a:r>
           </a:p>
           <a:p>
             <a:pPr lvl="4"/>
             <a:r>
-              <a:rPr lang="en-US" smtClean="0"/>
+              <a:rPr lang="en-US"/>
               <a:t>Fifth level</a:t>
             </a:r>
-            <a:endParaRPr lang="en-US"/>
           </a:p>
         </p:txBody>
       </p:sp>
@@ -829,7 +840,7 @@
           <a:p>
             <a:fld id="{5BCAD085-E8A6-8845-BD4E-CB4CCA059FC4}" type="datetimeFigureOut">
               <a:rPr lang="en-US" smtClean="0"/>
-              <a:t>1/27/13</a:t>
+              <a:t>7/21/2026</a:t>
             </a:fld>
             <a:endParaRPr lang="en-US"/>
           </a:p>
@@ -871,7 +882,7 @@
           <a:p>
             <a:fld id="{C1FF6DA9-008F-8B48-92A6-B652298478BF}" type="slidenum">
               <a:rPr lang="en-US" smtClean="0"/>
-              <a:t>‹#›</a:t>
+              <a:t>‹nº›</a:t>
             </a:fld>
             <a:endParaRPr lang="en-US"/>
           </a:p>
@@ -932,10 +943,9 @@
           </a:lstStyle>
           <a:p>
             <a:r>
-              <a:rPr lang="en-US" smtClean="0"/>
+              <a:rPr lang="en-US"/>
               <a:t>Click to edit Master title style</a:t>
             </a:r>
-            <a:endParaRPr lang="en-US"/>
           </a:p>
         </p:txBody>
       </p:sp>
@@ -1052,7 +1062,7 @@
           <a:p>
             <a:pPr lvl="0"/>
             <a:r>
-              <a:rPr lang="en-US" smtClean="0"/>
+              <a:rPr lang="en-US"/>
               <a:t>Click to edit Master text styles</a:t>
             </a:r>
           </a:p>
@@ -1075,7 +1085,7 @@
           <a:p>
             <a:fld id="{5BCAD085-E8A6-8845-BD4E-CB4CCA059FC4}" type="datetimeFigureOut">
               <a:rPr lang="en-US" smtClean="0"/>
-              <a:t>1/27/13</a:t>
+              <a:t>7/21/2026</a:t>
             </a:fld>
             <a:endParaRPr lang="en-US"/>
           </a:p>
@@ -1117,7 +1127,7 @@
           <a:p>
             <a:fld id="{C1FF6DA9-008F-8B48-92A6-B652298478BF}" type="slidenum">
               <a:rPr lang="en-US" smtClean="0"/>
-              <a:t>‹#›</a:t>
+              <a:t>‹nº›</a:t>
             </a:fld>
             <a:endParaRPr lang="en-US"/>
           </a:p>
@@ -1169,10 +1179,9 @@
           <a:lstStyle/>
           <a:p>
             <a:r>
-              <a:rPr lang="en-US" smtClean="0"/>
+              <a:rPr lang="en-US"/>
               <a:t>Click to edit Master title style</a:t>
             </a:r>
-            <a:endParaRPr lang="en-US"/>
           </a:p>
         </p:txBody>
       </p:sp>
@@ -1226,38 +1235,37 @@
           <a:p>
             <a:pPr lvl="0"/>
             <a:r>
-              <a:rPr lang="en-US" smtClean="0"/>
+              <a:rPr lang="en-US"/>
               <a:t>Click to edit Master text styles</a:t>
             </a:r>
           </a:p>
           <a:p>
             <a:pPr lvl="1"/>
             <a:r>
-              <a:rPr lang="en-US" smtClean="0"/>
+              <a:rPr lang="en-US"/>
               <a:t>Second level</a:t>
             </a:r>
           </a:p>
           <a:p>
             <a:pPr lvl="2"/>
             <a:r>
-              <a:rPr lang="en-US" smtClean="0"/>
+              <a:rPr lang="en-US"/>
               <a:t>Third level</a:t>
             </a:r>
           </a:p>
           <a:p>
             <a:pPr lvl="3"/>
             <a:r>
-              <a:rPr lang="en-US" smtClean="0"/>
+              <a:rPr lang="en-US"/>
               <a:t>Fourth level</a:t>
             </a:r>
           </a:p>
           <a:p>
             <a:pPr lvl="4"/>
             <a:r>
-              <a:rPr lang="en-US" smtClean="0"/>
+              <a:rPr lang="en-US"/>
               <a:t>Fifth level</a:t>
             </a:r>
-            <a:endParaRPr lang="en-US"/>
           </a:p>
         </p:txBody>
       </p:sp>
@@ -1311,38 +1319,37 @@
           <a:p>
             <a:pPr lvl="0"/>
             <a:r>
-              <a:rPr lang="en-US" smtClean="0"/>
+              <a:rPr lang="en-US"/>
               <a:t>Click to edit Master text styles</a:t>
             </a:r>
           </a:p>
           <a:p>
             <a:pPr lvl="1"/>
             <a:r>
-              <a:rPr lang="en-US" smtClean="0"/>
+              <a:rPr lang="en-US"/>
               <a:t>Second level</a:t>
             </a:r>
           </a:p>
           <a:p>
             <a:pPr lvl="2"/>
             <a:r>
-              <a:rPr lang="en-US" smtClean="0"/>
+              <a:rPr lang="en-US"/>
               <a:t>Third level</a:t>
             </a:r>
           </a:p>
           <a:p>
             <a:pPr lvl="3"/>
             <a:r>
-              <a:rPr lang="en-US" smtClean="0"/>
+              <a:rPr lang="en-US"/>
               <a:t>Fourth level</a:t>
             </a:r>
           </a:p>
           <a:p>
             <a:pPr lvl="4"/>
             <a:r>
-              <a:rPr lang="en-US" smtClean="0"/>
+              <a:rPr lang="en-US"/>
               <a:t>Fifth level</a:t>
             </a:r>
-            <a:endParaRPr lang="en-US"/>
           </a:p>
         </p:txBody>
       </p:sp>
@@ -1363,7 +1370,7 @@
           <a:p>
             <a:fld id="{5BCAD085-E8A6-8845-BD4E-CB4CCA059FC4}" type="datetimeFigureOut">
               <a:rPr lang="en-US" smtClean="0"/>
-              <a:t>1/27/13</a:t>
+              <a:t>7/21/2026</a:t>
             </a:fld>
             <a:endParaRPr lang="en-US"/>
           </a:p>
@@ -1405,7 +1412,7 @@
           <a:p>
             <a:fld id="{C1FF6DA9-008F-8B48-92A6-B652298478BF}" type="slidenum">
               <a:rPr lang="en-US" smtClean="0"/>
-              <a:t>‹#›</a:t>
+              <a:t>‹nº›</a:t>
             </a:fld>
             <a:endParaRPr lang="en-US"/>
           </a:p>
@@ -1461,10 +1468,9 @@
           </a:lstStyle>
           <a:p>
             <a:r>
-              <a:rPr lang="en-US" smtClean="0"/>
+              <a:rPr lang="en-US"/>
               <a:t>Click to edit Master title style</a:t>
             </a:r>
-            <a:endParaRPr lang="en-US"/>
           </a:p>
         </p:txBody>
       </p:sp>
@@ -1527,7 +1533,7 @@
           <a:p>
             <a:pPr lvl="0"/>
             <a:r>
-              <a:rPr lang="en-US" smtClean="0"/>
+              <a:rPr lang="en-US"/>
               <a:t>Click to edit Master text styles</a:t>
             </a:r>
           </a:p>
@@ -1583,38 +1589,37 @@
           <a:p>
             <a:pPr lvl="0"/>
             <a:r>
-              <a:rPr lang="en-US" smtClean="0"/>
+              <a:rPr lang="en-US"/>
               <a:t>Click to edit Master text styles</a:t>
             </a:r>
           </a:p>
           <a:p>
             <a:pPr lvl="1"/>
             <a:r>
-              <a:rPr lang="en-US" smtClean="0"/>
+              <a:rPr lang="en-US"/>
               <a:t>Second level</a:t>
             </a:r>
           </a:p>
           <a:p>
             <a:pPr lvl="2"/>
             <a:r>
-              <a:rPr lang="en-US" smtClean="0"/>
+              <a:rPr lang="en-US"/>
               <a:t>Third level</a:t>
             </a:r>
           </a:p>
           <a:p>
             <a:pPr lvl="3"/>
             <a:r>
-              <a:rPr lang="en-US" smtClean="0"/>
+              <a:rPr lang="en-US"/>
               <a:t>Fourth level</a:t>
             </a:r>
           </a:p>
           <a:p>
             <a:pPr lvl="4"/>
             <a:r>
-              <a:rPr lang="en-US" smtClean="0"/>
+              <a:rPr lang="en-US"/>
               <a:t>Fifth level</a:t>
             </a:r>
-            <a:endParaRPr lang="en-US"/>
           </a:p>
         </p:txBody>
       </p:sp>
@@ -1677,7 +1682,7 @@
           <a:p>
             <a:pPr lvl="0"/>
             <a:r>
-              <a:rPr lang="en-US" smtClean="0"/>
+              <a:rPr lang="en-US"/>
               <a:t>Click to edit Master text styles</a:t>
             </a:r>
           </a:p>
@@ -1733,38 +1738,37 @@
           <a:p>
             <a:pPr lvl="0"/>
             <a:r>
-              <a:rPr lang="en-US" smtClean="0"/>
+              <a:rPr lang="en-US"/>
               <a:t>Click to edit Master text styles</a:t>
             </a:r>
           </a:p>
           <a:p>
             <a:pPr lvl="1"/>
             <a:r>
-              <a:rPr lang="en-US" smtClean="0"/>
+              <a:rPr lang="en-US"/>
               <a:t>Second level</a:t>
             </a:r>
           </a:p>
           <a:p>
             <a:pPr lvl="2"/>
             <a:r>
-              <a:rPr lang="en-US" smtClean="0"/>
+              <a:rPr lang="en-US"/>
               <a:t>Third level</a:t>
             </a:r>
           </a:p>
           <a:p>
             <a:pPr lvl="3"/>
             <a:r>
-              <a:rPr lang="en-US" smtClean="0"/>
+              <a:rPr lang="en-US"/>
               <a:t>Fourth level</a:t>
             </a:r>
           </a:p>
           <a:p>
             <a:pPr lvl="4"/>
             <a:r>
-              <a:rPr lang="en-US" smtClean="0"/>
+              <a:rPr lang="en-US"/>
               <a:t>Fifth level</a:t>
             </a:r>
-            <a:endParaRPr lang="en-US"/>
           </a:p>
         </p:txBody>
       </p:sp>
@@ -1785,7 +1789,7 @@
           <a:p>
             <a:fld id="{5BCAD085-E8A6-8845-BD4E-CB4CCA059FC4}" type="datetimeFigureOut">
               <a:rPr lang="en-US" smtClean="0"/>
-              <a:t>1/27/13</a:t>
+              <a:t>7/21/2026</a:t>
             </a:fld>
             <a:endParaRPr lang="en-US"/>
           </a:p>
@@ -1827,7 +1831,7 @@
           <a:p>
             <a:fld id="{C1FF6DA9-008F-8B48-92A6-B652298478BF}" type="slidenum">
               <a:rPr lang="en-US" smtClean="0"/>
-              <a:t>‹#›</a:t>
+              <a:t>‹nº›</a:t>
             </a:fld>
             <a:endParaRPr lang="en-US"/>
           </a:p>
@@ -1879,10 +1883,9 @@
           <a:lstStyle/>
           <a:p>
             <a:r>
-              <a:rPr lang="en-US" smtClean="0"/>
+              <a:rPr lang="en-US"/>
               <a:t>Click to edit Master title style</a:t>
             </a:r>
-            <a:endParaRPr lang="en-US"/>
           </a:p>
         </p:txBody>
       </p:sp>
@@ -1903,7 +1906,7 @@
           <a:p>
             <a:fld id="{5BCAD085-E8A6-8845-BD4E-CB4CCA059FC4}" type="datetimeFigureOut">
               <a:rPr lang="en-US" smtClean="0"/>
-              <a:t>1/27/13</a:t>
+              <a:t>7/21/2026</a:t>
             </a:fld>
             <a:endParaRPr lang="en-US"/>
           </a:p>
@@ -1945,7 +1948,7 @@
           <a:p>
             <a:fld id="{C1FF6DA9-008F-8B48-92A6-B652298478BF}" type="slidenum">
               <a:rPr lang="en-US" smtClean="0"/>
-              <a:t>‹#›</a:t>
+              <a:t>‹nº›</a:t>
             </a:fld>
             <a:endParaRPr lang="en-US"/>
           </a:p>
@@ -1998,7 +2001,7 @@
           <a:p>
             <a:fld id="{5BCAD085-E8A6-8845-BD4E-CB4CCA059FC4}" type="datetimeFigureOut">
               <a:rPr lang="en-US" smtClean="0"/>
-              <a:t>1/27/13</a:t>
+              <a:t>7/21/2026</a:t>
             </a:fld>
             <a:endParaRPr lang="en-US"/>
           </a:p>
@@ -2040,7 +2043,7 @@
           <a:p>
             <a:fld id="{C1FF6DA9-008F-8B48-92A6-B652298478BF}" type="slidenum">
               <a:rPr lang="en-US" smtClean="0"/>
-              <a:t>‹#›</a:t>
+              <a:t>‹nº›</a:t>
             </a:fld>
             <a:endParaRPr lang="en-US"/>
           </a:p>
@@ -2101,10 +2104,9 @@
           </a:lstStyle>
           <a:p>
             <a:r>
-              <a:rPr lang="en-US" smtClean="0"/>
+              <a:rPr lang="en-US"/>
               <a:t>Click to edit Master title style</a:t>
             </a:r>
-            <a:endParaRPr lang="en-US"/>
           </a:p>
         </p:txBody>
       </p:sp>
@@ -2158,38 +2160,37 @@
           <a:p>
             <a:pPr lvl="0"/>
             <a:r>
-              <a:rPr lang="en-US" smtClean="0"/>
+              <a:rPr lang="en-US"/>
               <a:t>Click to edit Master text styles</a:t>
             </a:r>
           </a:p>
           <a:p>
             <a:pPr lvl="1"/>
             <a:r>
-              <a:rPr lang="en-US" smtClean="0"/>
+              <a:rPr lang="en-US"/>
               <a:t>Second level</a:t>
             </a:r>
           </a:p>
           <a:p>
             <a:pPr lvl="2"/>
             <a:r>
-              <a:rPr lang="en-US" smtClean="0"/>
+              <a:rPr lang="en-US"/>
               <a:t>Third level</a:t>
             </a:r>
           </a:p>
           <a:p>
             <a:pPr lvl="3"/>
             <a:r>
-              <a:rPr lang="en-US" smtClean="0"/>
+              <a:rPr lang="en-US"/>
               <a:t>Fourth level</a:t>
             </a:r>
           </a:p>
           <a:p>
             <a:pPr lvl="4"/>
             <a:r>
-              <a:rPr lang="en-US" smtClean="0"/>
+              <a:rPr lang="en-US"/>
               <a:t>Fifth level</a:t>
             </a:r>
-            <a:endParaRPr lang="en-US"/>
           </a:p>
         </p:txBody>
       </p:sp>
@@ -2252,7 +2253,7 @@
           <a:p>
             <a:pPr lvl="0"/>
             <a:r>
-              <a:rPr lang="en-US" smtClean="0"/>
+              <a:rPr lang="en-US"/>
               <a:t>Click to edit Master text styles</a:t>
             </a:r>
           </a:p>
@@ -2275,7 +2276,7 @@
           <a:p>
             <a:fld id="{5BCAD085-E8A6-8845-BD4E-CB4CCA059FC4}" type="datetimeFigureOut">
               <a:rPr lang="en-US" smtClean="0"/>
-              <a:t>1/27/13</a:t>
+              <a:t>7/21/2026</a:t>
             </a:fld>
             <a:endParaRPr lang="en-US"/>
           </a:p>
@@ -2317,7 +2318,7 @@
           <a:p>
             <a:fld id="{C1FF6DA9-008F-8B48-92A6-B652298478BF}" type="slidenum">
               <a:rPr lang="en-US" smtClean="0"/>
-              <a:t>‹#›</a:t>
+              <a:t>‹nº›</a:t>
             </a:fld>
             <a:endParaRPr lang="en-US"/>
           </a:p>
@@ -2378,10 +2379,9 @@
           </a:lstStyle>
           <a:p>
             <a:r>
-              <a:rPr lang="en-US" smtClean="0"/>
+              <a:rPr lang="en-US"/>
               <a:t>Click to edit Master title style</a:t>
             </a:r>
-            <a:endParaRPr lang="en-US"/>
           </a:p>
         </p:txBody>
       </p:sp>
@@ -2505,7 +2505,7 @@
           <a:p>
             <a:pPr lvl="0"/>
             <a:r>
-              <a:rPr lang="en-US" smtClean="0"/>
+              <a:rPr lang="en-US"/>
               <a:t>Click to edit Master text styles</a:t>
             </a:r>
           </a:p>
@@ -2528,7 +2528,7 @@
           <a:p>
             <a:fld id="{5BCAD085-E8A6-8845-BD4E-CB4CCA059FC4}" type="datetimeFigureOut">
               <a:rPr lang="en-US" smtClean="0"/>
-              <a:t>1/27/13</a:t>
+              <a:t>7/21/2026</a:t>
             </a:fld>
             <a:endParaRPr lang="en-US"/>
           </a:p>
@@ -2570,7 +2570,7 @@
           <a:p>
             <a:fld id="{C1FF6DA9-008F-8B48-92A6-B652298478BF}" type="slidenum">
               <a:rPr lang="en-US" smtClean="0"/>
-              <a:t>‹#›</a:t>
+              <a:t>‹nº›</a:t>
             </a:fld>
             <a:endParaRPr lang="en-US"/>
           </a:p>
@@ -2637,10 +2637,9 @@
           <a:lstStyle/>
           <a:p>
             <a:r>
-              <a:rPr lang="en-US" smtClean="0"/>
+              <a:rPr lang="en-US"/>
               <a:t>Click to edit Master title style</a:t>
             </a:r>
-            <a:endParaRPr lang="en-US"/>
           </a:p>
         </p:txBody>
       </p:sp>
@@ -2671,38 +2670,37 @@
           <a:p>
             <a:pPr lvl="0"/>
             <a:r>
-              <a:rPr lang="en-US" smtClean="0"/>
+              <a:rPr lang="en-US"/>
               <a:t>Click to edit Master text styles</a:t>
             </a:r>
           </a:p>
           <a:p>
             <a:pPr lvl="1"/>
             <a:r>
-              <a:rPr lang="en-US" smtClean="0"/>
+              <a:rPr lang="en-US"/>
               <a:t>Second level</a:t>
             </a:r>
           </a:p>
           <a:p>
             <a:pPr lvl="2"/>
             <a:r>
-              <a:rPr lang="en-US" smtClean="0"/>
+              <a:rPr lang="en-US"/>
               <a:t>Third level</a:t>
             </a:r>
           </a:p>
           <a:p>
             <a:pPr lvl="3"/>
             <a:r>
-              <a:rPr lang="en-US" smtClean="0"/>
+              <a:rPr lang="en-US"/>
               <a:t>Fourth level</a:t>
             </a:r>
           </a:p>
           <a:p>
             <a:pPr lvl="4"/>
             <a:r>
-              <a:rPr lang="en-US" smtClean="0"/>
+              <a:rPr lang="en-US"/>
               <a:t>Fifth level</a:t>
             </a:r>
-            <a:endParaRPr lang="en-US"/>
           </a:p>
         </p:txBody>
       </p:sp>
@@ -2741,7 +2739,7 @@
           <a:p>
             <a:fld id="{5BCAD085-E8A6-8845-BD4E-CB4CCA059FC4}" type="datetimeFigureOut">
               <a:rPr lang="en-US" smtClean="0"/>
-              <a:t>1/27/13</a:t>
+              <a:t>7/21/2026</a:t>
             </a:fld>
             <a:endParaRPr lang="en-US"/>
           </a:p>
@@ -2819,7 +2817,7 @@
           <a:p>
             <a:fld id="{C1FF6DA9-008F-8B48-92A6-B652298478BF}" type="slidenum">
               <a:rPr lang="en-US" smtClean="0"/>
-              <a:t>‹#›</a:t>
+              <a:t>‹nº›</a:t>
             </a:fld>
             <a:endParaRPr lang="en-US"/>
           </a:p>
@@ -3100,7 +3098,7 @@
 </file>
 
 <file path=ppt/slides/slide1.xml><?xml version="1.0" encoding="utf-8"?>
-<p:sld xmlns:a="http://schemas.openxmlformats.org/drawingml/2006/main" xmlns:p="http://schemas.openxmlformats.org/presentationml/2006/main" xmlns:r="http://schemas.openxmlformats.org/officeDocument/2006/relationships">
+<p:sld xmlns:a="http://schemas.openxmlformats.org/drawingml/2006/main" xmlns:r="http://schemas.openxmlformats.org/officeDocument/2006/relationships" xmlns:p="http://schemas.openxmlformats.org/presentationml/2006/main">
   <p:cSld>
     <p:bg>
       <p:bgPr>
@@ -3116,7 +3114,14 @@
         <p:cNvGrpSpPr/>
         <p:nvPr/>
       </p:nvGrpSpPr>
-      <p:grpSpPr/>
+      <p:grpSpPr>
+        <a:xfrm>
+          <a:off x="0" y="0"/>
+          <a:ext cx="0" cy="0"/>
+          <a:chOff x="0" y="0"/>
+          <a:chExt cx="0" cy="0"/>
+        </a:xfrm>
+      </p:grpSpPr>
       <p:sp>
         <p:nvSpPr>
           <p:cNvPr id="2" name="TextBox 1"/>
@@ -3125,7 +3130,7 @@
         </p:nvSpPr>
         <p:spPr>
           <a:xfrm>
-            <a:off x="457200" y="1828800"/>
+            <a:off x="457200" y="0"/>
             <a:ext cx="8229600" cy="1371600"/>
           </a:xfrm>
           <a:prstGeom prst="rect">
@@ -3147,8 +3152,54 @@
               </a:defRPr>
             </a:pPr>
             <a:r>
-              <a:t>Design Racional de Inibidores Peptídicos de Tripsinas de Lepidoptera por IA Generativa</a:t>
-            </a:r>
+              <a:rPr dirty="0"/>
+              <a:t>Design </a:t>
+            </a:r>
+            <a:r>
+              <a:rPr dirty="0" err="1"/>
+              <a:t>Racional</a:t>
+            </a:r>
+            <a:r>
+              <a:rPr dirty="0"/>
+              <a:t> de </a:t>
+            </a:r>
+            <a:r>
+              <a:rPr dirty="0" err="1"/>
+              <a:t>Inibidores</a:t>
+            </a:r>
+            <a:r>
+              <a:rPr dirty="0"/>
+              <a:t> </a:t>
+            </a:r>
+            <a:r>
+              <a:rPr dirty="0" err="1"/>
+              <a:t>Peptídicos</a:t>
+            </a:r>
+            <a:r>
+              <a:rPr dirty="0"/>
+              <a:t> de </a:t>
+            </a:r>
+            <a:r>
+              <a:rPr dirty="0" err="1"/>
+              <a:t>Tripsinas</a:t>
+            </a:r>
+            <a:r>
+              <a:rPr dirty="0"/>
+              <a:t> de Lepidoptera </a:t>
+            </a:r>
+            <a:r>
+              <a:rPr dirty="0" err="1"/>
+              <a:t>por</a:t>
+            </a:r>
+            <a:r>
+              <a:rPr dirty="0"/>
+              <a:t> IA </a:t>
+            </a:r>
+            <a:r>
+              <a:rPr dirty="0" err="1"/>
+              <a:t>Generativa</a:t>
+            </a:r>
+            <a:endParaRPr dirty="0"/>
           </a:p>
         </p:txBody>
       </p:sp>
@@ -3196,7 +3247,7 @@
 </file>
 
 <file path=ppt/slides/slide10.xml><?xml version="1.0" encoding="utf-8"?>
-<p:sld xmlns:a="http://schemas.openxmlformats.org/drawingml/2006/main" xmlns:p="http://schemas.openxmlformats.org/presentationml/2006/main" xmlns:r="http://schemas.openxmlformats.org/officeDocument/2006/relationships">
+<p:sld xmlns:a="http://schemas.openxmlformats.org/drawingml/2006/main" xmlns:r="http://schemas.openxmlformats.org/officeDocument/2006/relationships" xmlns:p="http://schemas.openxmlformats.org/presentationml/2006/main">
   <p:cSld>
     <p:bg>
       <p:bgPr>
@@ -3212,7 +3263,14 @@
         <p:cNvGrpSpPr/>
         <p:nvPr/>
       </p:nvGrpSpPr>
-      <p:grpSpPr/>
+      <p:grpSpPr>
+        <a:xfrm>
+          <a:off x="0" y="0"/>
+          <a:ext cx="0" cy="0"/>
+          <a:chOff x="0" y="0"/>
+          <a:chExt cx="0" cy="0"/>
+        </a:xfrm>
+      </p:grpSpPr>
       <p:sp>
         <p:nvSpPr>
           <p:cNvPr id="2" name="TextBox 1"/>
@@ -3256,7 +3314,7 @@
         </p:nvSpPr>
         <p:spPr>
           <a:xfrm>
-            <a:off x="640080" y="1005840"/>
+            <a:off x="576072" y="1682496"/>
             <a:ext cx="5303520" cy="4572000"/>
           </a:xfrm>
           <a:prstGeom prst="rect">
@@ -3284,8 +3342,26 @@
               </a:defRPr>
             </a:pPr>
             <a:r>
-              <a:t>Dinâmica molecular: GROMACS + CHARMM36/CGenFF5.0, ensemble NPT, 100 ns por réplica</a:t>
-            </a:r>
+              <a:rPr dirty="0" err="1"/>
+              <a:t>Dinâmica</a:t>
+            </a:r>
+            <a:r>
+              <a:rPr dirty="0"/>
+              <a:t> molecular: GROMACS + CHARMM36/CGenFF5.0, ensemble NPT, 100 ns </a:t>
+            </a:r>
+            <a:r>
+              <a:rPr dirty="0" err="1"/>
+              <a:t>por</a:t>
+            </a:r>
+            <a:r>
+              <a:rPr dirty="0"/>
+              <a:t> </a:t>
+            </a:r>
+            <a:r>
+              <a:rPr dirty="0" err="1"/>
+              <a:t>réplica</a:t>
+            </a:r>
+            <a:endParaRPr dirty="0"/>
           </a:p>
           <a:p>
             <a:pPr>
@@ -3302,7 +3378,84 @@
               </a:defRPr>
             </a:pPr>
             <a:r>
-              <a:t>Análise de persistência: ocupância do complexo peptídeo-receptor em raios 4 Å / 5 Å / 6 Å vs. resíduo âncora (Asp P1 bolso)</a:t>
+              <a:rPr dirty="0" err="1"/>
+              <a:t>Análise</a:t>
+            </a:r>
+            <a:r>
+              <a:rPr dirty="0"/>
+              <a:t> de </a:t>
+            </a:r>
+            <a:r>
+              <a:rPr dirty="0" err="1"/>
+              <a:t>persistência</a:t>
+            </a:r>
+            <a:r>
+              <a:rPr dirty="0"/>
+              <a:t>: </a:t>
+            </a:r>
+            <a:r>
+              <a:rPr dirty="0" err="1"/>
+              <a:t>ocupância</a:t>
+            </a:r>
+            <a:r>
+              <a:rPr dirty="0"/>
+              <a:t> do </a:t>
+            </a:r>
+            <a:r>
+              <a:rPr dirty="0" err="1"/>
+              <a:t>complexo</a:t>
+            </a:r>
+            <a:r>
+              <a:rPr dirty="0"/>
+              <a:t> </a:t>
+            </a:r>
+            <a:r>
+              <a:rPr dirty="0" err="1"/>
+              <a:t>peptídeo</a:t>
+            </a:r>
+            <a:r>
+              <a:rPr dirty="0"/>
+              <a:t>-receptor </a:t>
+            </a:r>
+            <a:r>
+              <a:rPr dirty="0" err="1"/>
+              <a:t>em</a:t>
+            </a:r>
+            <a:r>
+              <a:rPr dirty="0"/>
+              <a:t> </a:t>
+            </a:r>
+            <a:r>
+              <a:rPr dirty="0" err="1"/>
+              <a:t>raios</a:t>
+            </a:r>
+            <a:r>
+              <a:rPr dirty="0"/>
+              <a:t> 4 Å / 5 Å / 6 Å vs. </a:t>
+            </a:r>
+            <a:r>
+              <a:rPr dirty="0" err="1"/>
+              <a:t>resíduo</a:t>
+            </a:r>
+            <a:r>
+              <a:rPr dirty="0"/>
+              <a:t> </a:t>
+            </a:r>
+            <a:r>
+              <a:rPr dirty="0" err="1"/>
+              <a:t>âncora</a:t>
+            </a:r>
+            <a:r>
+              <a:rPr dirty="0"/>
+              <a:t> (Asp P1 </a:t>
+            </a:r>
+            <a:r>
+              <a:rPr dirty="0" err="1"/>
+              <a:t>bolso</a:t>
+            </a:r>
+            <a:r>
+              <a:rPr dirty="0"/>
+              <a:t>)</a:t>
             </a:r>
           </a:p>
           <a:p>
@@ -3320,7 +3473,92 @@
               </a:defRPr>
             </a:pPr>
             <a:r>
-              <a:t>Métrica: % de frames em que peptídeo permanece dentro do raio (indicador de permanência real no sítio catalítico)</a:t>
+              <a:rPr dirty="0" err="1"/>
+              <a:t>Métrica</a:t>
+            </a:r>
+            <a:r>
+              <a:rPr dirty="0"/>
+              <a:t>: % de frames </a:t>
+            </a:r>
+            <a:r>
+              <a:rPr dirty="0" err="1"/>
+              <a:t>em</a:t>
+            </a:r>
+            <a:r>
+              <a:rPr dirty="0"/>
+              <a:t> </a:t>
+            </a:r>
+            <a:r>
+              <a:rPr dirty="0" err="1"/>
+              <a:t>que</a:t>
+            </a:r>
+            <a:r>
+              <a:rPr dirty="0"/>
+              <a:t> </a:t>
+            </a:r>
+            <a:r>
+              <a:rPr dirty="0" err="1"/>
+              <a:t>peptídeo</a:t>
+            </a:r>
+            <a:r>
+              <a:rPr dirty="0"/>
+              <a:t> </a:t>
+            </a:r>
+            <a:r>
+              <a:rPr dirty="0" err="1"/>
+              <a:t>permanece</a:t>
+            </a:r>
+            <a:r>
+              <a:rPr dirty="0"/>
+              <a:t> </a:t>
+            </a:r>
+            <a:r>
+              <a:rPr dirty="0" err="1"/>
+              <a:t>dentro</a:t>
+            </a:r>
+            <a:r>
+              <a:rPr dirty="0"/>
+              <a:t> do </a:t>
+            </a:r>
+            <a:r>
+              <a:rPr dirty="0" err="1"/>
+              <a:t>raio</a:t>
+            </a:r>
+            <a:r>
+              <a:rPr dirty="0"/>
+              <a:t> (</a:t>
+            </a:r>
+            <a:r>
+              <a:rPr dirty="0" err="1"/>
+              <a:t>indicador</a:t>
+            </a:r>
+            <a:r>
+              <a:rPr dirty="0"/>
+              <a:t> de </a:t>
+            </a:r>
+            <a:r>
+              <a:rPr dirty="0" err="1"/>
+              <a:t>permanência</a:t>
+            </a:r>
+            <a:r>
+              <a:rPr dirty="0"/>
+              <a:t> real no </a:t>
+            </a:r>
+            <a:r>
+              <a:rPr dirty="0" err="1"/>
+              <a:t>sítio</a:t>
+            </a:r>
+            <a:r>
+              <a:rPr dirty="0"/>
+              <a:t> </a:t>
+            </a:r>
+            <a:r>
+              <a:rPr dirty="0" err="1"/>
+              <a:t>catalítico</a:t>
+            </a:r>
+            <a:r>
+              <a:rPr dirty="0"/>
+              <a:t>)</a:t>
             </a:r>
           </a:p>
         </p:txBody>
@@ -3367,6 +3605,7 @@
           <a:lstStyle/>
           <a:p>
             <a:pPr algn="ctr"/>
+            <a:endParaRPr/>
           </a:p>
         </p:txBody>
       </p:sp>
@@ -3379,7 +3618,7 @@
 </file>
 
 <file path=ppt/slides/slide11.xml><?xml version="1.0" encoding="utf-8"?>
-<p:sld xmlns:a="http://schemas.openxmlformats.org/drawingml/2006/main" xmlns:p="http://schemas.openxmlformats.org/presentationml/2006/main" xmlns:r="http://schemas.openxmlformats.org/officeDocument/2006/relationships">
+<p:sld xmlns:a="http://schemas.openxmlformats.org/drawingml/2006/main" xmlns:r="http://schemas.openxmlformats.org/officeDocument/2006/relationships" xmlns:p="http://schemas.openxmlformats.org/presentationml/2006/main">
   <p:cSld>
     <p:bg>
       <p:bgPr>
@@ -3395,7 +3634,14 @@
         <p:cNvGrpSpPr/>
         <p:nvPr/>
       </p:nvGrpSpPr>
-      <p:grpSpPr/>
+      <p:grpSpPr>
+        <a:xfrm>
+          <a:off x="0" y="0"/>
+          <a:ext cx="0" cy="0"/>
+          <a:chOff x="0" y="0"/>
+          <a:chExt cx="0" cy="0"/>
+        </a:xfrm>
+      </p:grpSpPr>
       <p:sp>
         <p:nvSpPr>
           <p:cNvPr id="2" name="TextBox 1"/>
@@ -3439,7 +3685,7 @@
         </p:nvSpPr>
         <p:spPr>
           <a:xfrm>
-            <a:off x="640080" y="1005840"/>
+            <a:off x="640080" y="1143000"/>
             <a:ext cx="5303520" cy="4572000"/>
           </a:xfrm>
           <a:prstGeom prst="rect">
@@ -3467,7 +3713,64 @@
               </a:defRPr>
             </a:pPr>
             <a:r>
-              <a:t>Docking contra 11 espécies-praga adicionais: *D. saccharalis*, *H. virescens*, *C. includens*, etc. (receptores reais de literatura/UniProt)</a:t>
+              <a:rPr dirty="0"/>
+              <a:t>Docking contra 11 </a:t>
+            </a:r>
+            <a:r>
+              <a:rPr dirty="0" err="1"/>
+              <a:t>espécies-praga</a:t>
+            </a:r>
+            <a:r>
+              <a:rPr dirty="0"/>
+              <a:t> </a:t>
+            </a:r>
+            <a:r>
+              <a:rPr dirty="0" err="1"/>
+              <a:t>adicionais</a:t>
+            </a:r>
+            <a:r>
+              <a:rPr dirty="0"/>
+              <a:t>: *D. </a:t>
+            </a:r>
+            <a:r>
+              <a:rPr dirty="0" err="1"/>
+              <a:t>saccharalis</a:t>
+            </a:r>
+            <a:r>
+              <a:rPr dirty="0"/>
+              <a:t>*, *H. virescens*, *C. </a:t>
+            </a:r>
+            <a:r>
+              <a:rPr dirty="0" err="1"/>
+              <a:t>includens</a:t>
+            </a:r>
+            <a:r>
+              <a:rPr dirty="0"/>
+              <a:t>*, etc. (</a:t>
+            </a:r>
+            <a:r>
+              <a:rPr dirty="0" err="1"/>
+              <a:t>receptores</a:t>
+            </a:r>
+            <a:r>
+              <a:rPr dirty="0"/>
+              <a:t> reais de </a:t>
+            </a:r>
+            <a:r>
+              <a:rPr dirty="0" err="1"/>
+              <a:t>literatura</a:t>
+            </a:r>
+            <a:r>
+              <a:rPr dirty="0"/>
+              <a:t>/</a:t>
+            </a:r>
+            <a:r>
+              <a:rPr dirty="0" err="1"/>
+              <a:t>UniProt</a:t>
+            </a:r>
+            <a:r>
+              <a:rPr dirty="0"/>
+              <a:t>)</a:t>
             </a:r>
           </a:p>
           <a:p>
@@ -3485,8 +3788,82 @@
               </a:defRPr>
             </a:pPr>
             <a:r>
-              <a:t>Métrica: Seletividade Índice (SI) = Vina(não-alvo humano) − Vina(alvo primário) — valores ≥ 2,0 kcal/mol = especificidade confirmada</a:t>
-            </a:r>
+              <a:rPr dirty="0" err="1"/>
+              <a:t>Métrica</a:t>
+            </a:r>
+            <a:r>
+              <a:rPr dirty="0"/>
+              <a:t>: </a:t>
+            </a:r>
+            <a:r>
+              <a:rPr dirty="0" err="1"/>
+              <a:t>Seletividade</a:t>
+            </a:r>
+            <a:r>
+              <a:rPr dirty="0"/>
+              <a:t> </a:t>
+            </a:r>
+            <a:r>
+              <a:rPr dirty="0" err="1"/>
+              <a:t>Índice</a:t>
+            </a:r>
+            <a:r>
+              <a:rPr dirty="0"/>
+              <a:t> (SI) = Vina(</a:t>
+            </a:r>
+            <a:r>
+              <a:rPr dirty="0" err="1"/>
+              <a:t>não-alvo</a:t>
+            </a:r>
+            <a:r>
+              <a:rPr dirty="0"/>
+              <a:t> </a:t>
+            </a:r>
+            <a:r>
+              <a:rPr dirty="0" err="1"/>
+              <a:t>humano</a:t>
+            </a:r>
+            <a:r>
+              <a:rPr dirty="0"/>
+              <a:t>) − Vina(</a:t>
+            </a:r>
+            <a:r>
+              <a:rPr dirty="0" err="1"/>
+              <a:t>alvo</a:t>
+            </a:r>
+            <a:r>
+              <a:rPr dirty="0"/>
+              <a:t> </a:t>
+            </a:r>
+            <a:r>
+              <a:rPr dirty="0" err="1"/>
+              <a:t>primário</a:t>
+            </a:r>
+            <a:r>
+              <a:rPr dirty="0"/>
+              <a:t>) — </a:t>
+            </a:r>
+            <a:r>
+              <a:rPr dirty="0" err="1"/>
+              <a:t>valores</a:t>
+            </a:r>
+            <a:r>
+              <a:rPr dirty="0"/>
+              <a:t> ≥ 2,0 kcal/mol = </a:t>
+            </a:r>
+            <a:r>
+              <a:rPr dirty="0" err="1"/>
+              <a:t>especificidade</a:t>
+            </a:r>
+            <a:r>
+              <a:rPr dirty="0"/>
+              <a:t> </a:t>
+            </a:r>
+            <a:r>
+              <a:rPr dirty="0" err="1"/>
+              <a:t>confirmada</a:t>
+            </a:r>
+            <a:endParaRPr dirty="0"/>
           </a:p>
           <a:p>
             <a:pPr>
@@ -3503,7 +3880,48 @@
               </a:defRPr>
             </a:pPr>
             <a:r>
-              <a:t>Cross-species: afinidade mantida contra múltiplas praga (requisito R3)</a:t>
+              <a:rPr dirty="0"/>
+              <a:t>Cross-species: </a:t>
+            </a:r>
+            <a:r>
+              <a:rPr dirty="0" err="1"/>
+              <a:t>afinidade</a:t>
+            </a:r>
+            <a:r>
+              <a:rPr dirty="0"/>
+              <a:t> </a:t>
+            </a:r>
+            <a:r>
+              <a:rPr dirty="0" err="1"/>
+              <a:t>mantida</a:t>
+            </a:r>
+            <a:r>
+              <a:rPr dirty="0"/>
+              <a:t> contra </a:t>
+            </a:r>
+            <a:r>
+              <a:rPr dirty="0" err="1"/>
+              <a:t>múltiplas</a:t>
+            </a:r>
+            <a:r>
+              <a:rPr dirty="0"/>
+              <a:t> </a:t>
+            </a:r>
+            <a:r>
+              <a:rPr dirty="0" err="1"/>
+              <a:t>praga</a:t>
+            </a:r>
+            <a:r>
+              <a:rPr dirty="0"/>
+              <a:t> (</a:t>
+            </a:r>
+            <a:r>
+              <a:rPr dirty="0" err="1"/>
+              <a:t>requisito</a:t>
+            </a:r>
+            <a:r>
+              <a:rPr dirty="0"/>
+              <a:t> R3)</a:t>
             </a:r>
           </a:p>
         </p:txBody>
@@ -3550,6 +3968,7 @@
           <a:lstStyle/>
           <a:p>
             <a:pPr algn="ctr"/>
+            <a:endParaRPr/>
           </a:p>
         </p:txBody>
       </p:sp>
@@ -3562,7 +3981,7 @@
 </file>
 
 <file path=ppt/slides/slide12.xml><?xml version="1.0" encoding="utf-8"?>
-<p:sld xmlns:a="http://schemas.openxmlformats.org/drawingml/2006/main" xmlns:p="http://schemas.openxmlformats.org/presentationml/2006/main" xmlns:r="http://schemas.openxmlformats.org/officeDocument/2006/relationships">
+<p:sld xmlns:a="http://schemas.openxmlformats.org/drawingml/2006/main" xmlns:r="http://schemas.openxmlformats.org/officeDocument/2006/relationships" xmlns:p="http://schemas.openxmlformats.org/presentationml/2006/main">
   <p:cSld>
     <p:bg>
       <p:bgPr>
@@ -3578,7 +3997,14 @@
         <p:cNvGrpSpPr/>
         <p:nvPr/>
       </p:nvGrpSpPr>
-      <p:grpSpPr/>
+      <p:grpSpPr>
+        <a:xfrm>
+          <a:off x="0" y="0"/>
+          <a:ext cx="0" cy="0"/>
+          <a:chOff x="0" y="0"/>
+          <a:chExt cx="0" cy="0"/>
+        </a:xfrm>
+      </p:grpSpPr>
       <p:sp>
         <p:nvSpPr>
           <p:cNvPr id="2" name="TextBox 1"/>
@@ -3622,7 +4048,7 @@
         </p:nvSpPr>
         <p:spPr>
           <a:xfrm>
-            <a:off x="640080" y="1005840"/>
+            <a:off x="457200" y="1783080"/>
             <a:ext cx="5303520" cy="4572000"/>
           </a:xfrm>
           <a:prstGeom prst="rect">
@@ -3650,7 +4076,40 @@
               </a:defRPr>
             </a:pPr>
             <a:r>
-              <a:t>TOP-5 candidatos por reprodutibilidade + persistência: SRTRR, VRYRR, VRRPR, HRPRRPR, HRPRRSR</a:t>
+              <a:rPr dirty="0"/>
+              <a:t>TOP-5 </a:t>
+            </a:r>
+            <a:r>
+              <a:rPr dirty="0" err="1"/>
+              <a:t>candidatos</a:t>
+            </a:r>
+            <a:r>
+              <a:rPr dirty="0"/>
+              <a:t> </a:t>
+            </a:r>
+            <a:r>
+              <a:rPr dirty="0" err="1"/>
+              <a:t>por</a:t>
+            </a:r>
+            <a:r>
+              <a:rPr dirty="0"/>
+              <a:t> </a:t>
+            </a:r>
+            <a:r>
+              <a:rPr dirty="0" err="1"/>
+              <a:t>reprodutibilidade</a:t>
+            </a:r>
+            <a:r>
+              <a:rPr dirty="0"/>
+              <a:t> + </a:t>
+            </a:r>
+            <a:r>
+              <a:rPr dirty="0" err="1"/>
+              <a:t>persistência</a:t>
+            </a:r>
+            <a:r>
+              <a:rPr dirty="0"/>
+              <a:t>: SRTRR, VRYRR, VRRPR, HRPRRPR, HRPRRSR</a:t>
             </a:r>
           </a:p>
           <a:p>
@@ -3668,8 +4127,42 @@
               </a:defRPr>
             </a:pPr>
             <a:r>
-              <a:t>Síntese de métricas: RMSD médio, ocupância S1 @ 6 Å, SI mínimo</a:t>
-            </a:r>
+              <a:rPr dirty="0" err="1"/>
+              <a:t>Síntese</a:t>
+            </a:r>
+            <a:r>
+              <a:rPr dirty="0"/>
+              <a:t> de </a:t>
+            </a:r>
+            <a:r>
+              <a:rPr dirty="0" err="1"/>
+              <a:t>métricas</a:t>
+            </a:r>
+            <a:r>
+              <a:rPr dirty="0"/>
+              <a:t>: RMSD </a:t>
+            </a:r>
+            <a:r>
+              <a:rPr dirty="0" err="1"/>
+              <a:t>médio</a:t>
+            </a:r>
+            <a:r>
+              <a:rPr dirty="0"/>
+              <a:t>, </a:t>
+            </a:r>
+            <a:r>
+              <a:rPr dirty="0" err="1"/>
+              <a:t>ocupância</a:t>
+            </a:r>
+            <a:r>
+              <a:rPr dirty="0"/>
+              <a:t> S1 @ 6 Å, SI </a:t>
+            </a:r>
+            <a:r>
+              <a:rPr dirty="0" err="1"/>
+              <a:t>mínimo</a:t>
+            </a:r>
+            <a:endParaRPr dirty="0"/>
           </a:p>
           <a:p>
             <a:pPr>
@@ -3686,7 +4179,44 @@
               </a:defRPr>
             </a:pPr>
             <a:r>
-              <a:t>Contato com tríade catalítica: verificado via PLIP (interações reais)</a:t>
+              <a:rPr dirty="0" err="1"/>
+              <a:t>Contato</a:t>
+            </a:r>
+            <a:r>
+              <a:rPr dirty="0"/>
+              <a:t> com </a:t>
+            </a:r>
+            <a:r>
+              <a:rPr dirty="0" err="1"/>
+              <a:t>tríade</a:t>
+            </a:r>
+            <a:r>
+              <a:rPr dirty="0"/>
+              <a:t> </a:t>
+            </a:r>
+            <a:r>
+              <a:rPr dirty="0" err="1"/>
+              <a:t>catalítica</a:t>
+            </a:r>
+            <a:r>
+              <a:rPr dirty="0"/>
+              <a:t>: </a:t>
+            </a:r>
+            <a:r>
+              <a:rPr dirty="0" err="1"/>
+              <a:t>verificado</a:t>
+            </a:r>
+            <a:r>
+              <a:rPr dirty="0"/>
+              <a:t> via PLIP (</a:t>
+            </a:r>
+            <a:r>
+              <a:rPr dirty="0" err="1"/>
+              <a:t>interações</a:t>
+            </a:r>
+            <a:r>
+              <a:rPr dirty="0"/>
+              <a:t> reais)</a:t>
             </a:r>
           </a:p>
         </p:txBody>
@@ -3733,6 +4263,7 @@
           <a:lstStyle/>
           <a:p>
             <a:pPr algn="ctr"/>
+            <a:endParaRPr/>
           </a:p>
         </p:txBody>
       </p:sp>
@@ -3769,7 +4300,7 @@
 </file>
 
 <file path=ppt/slides/slide13.xml><?xml version="1.0" encoding="utf-8"?>
-<p:sld xmlns:a="http://schemas.openxmlformats.org/drawingml/2006/main" xmlns:p="http://schemas.openxmlformats.org/presentationml/2006/main" xmlns:r="http://schemas.openxmlformats.org/officeDocument/2006/relationships">
+<p:sld xmlns:a="http://schemas.openxmlformats.org/drawingml/2006/main" xmlns:r="http://schemas.openxmlformats.org/officeDocument/2006/relationships" xmlns:p="http://schemas.openxmlformats.org/presentationml/2006/main">
   <p:cSld>
     <p:bg>
       <p:bgPr>
@@ -3785,7 +4316,14 @@
         <p:cNvGrpSpPr/>
         <p:nvPr/>
       </p:nvGrpSpPr>
-      <p:grpSpPr/>
+      <p:grpSpPr>
+        <a:xfrm>
+          <a:off x="0" y="0"/>
+          <a:ext cx="0" cy="0"/>
+          <a:chOff x="0" y="0"/>
+          <a:chExt cx="0" cy="0"/>
+        </a:xfrm>
+      </p:grpSpPr>
       <p:sp>
         <p:nvSpPr>
           <p:cNvPr id="2" name="TextBox 1"/>
@@ -3829,7 +4367,7 @@
         </p:nvSpPr>
         <p:spPr>
           <a:xfrm>
-            <a:off x="640080" y="1005840"/>
+            <a:off x="640080" y="1700784"/>
             <a:ext cx="5303520" cy="4572000"/>
           </a:xfrm>
           <a:prstGeom prst="rect">
@@ -3857,7 +4395,40 @@
               </a:defRPr>
             </a:pPr>
             <a:r>
-              <a:t>TOP-13 candidatos rodados em triplicate (rep1, rep2, rep3, sementes -1)</a:t>
+              <a:rPr dirty="0"/>
+              <a:t>TOP-13 </a:t>
+            </a:r>
+            <a:r>
+              <a:rPr dirty="0" err="1"/>
+              <a:t>candidatos</a:t>
+            </a:r>
+            <a:r>
+              <a:rPr dirty="0"/>
+              <a:t> </a:t>
+            </a:r>
+            <a:r>
+              <a:rPr dirty="0" err="1"/>
+              <a:t>rodados</a:t>
+            </a:r>
+            <a:r>
+              <a:rPr dirty="0"/>
+              <a:t> </a:t>
+            </a:r>
+            <a:r>
+              <a:rPr dirty="0" err="1"/>
+              <a:t>em</a:t>
+            </a:r>
+            <a:r>
+              <a:rPr dirty="0"/>
+              <a:t> triplicate (rep1, rep2, rep3, </a:t>
+            </a:r>
+            <a:r>
+              <a:rPr dirty="0" err="1"/>
+              <a:t>sementes</a:t>
+            </a:r>
+            <a:r>
+              <a:rPr dirty="0"/>
+              <a:t> -1)</a:t>
             </a:r>
           </a:p>
           <a:p>
@@ -3875,8 +4446,70 @@
               </a:defRPr>
             </a:pPr>
             <a:r>
-              <a:t>**Achado-chave**: 2 'recordistas de estabilidade' de réplica única (RLREELKKAEEWLEKRRKEE 0,294 nm; VRTRR 0,194 nm) mostraram DP real de 0,606 nm e 0,360 nm — resultado NÃO reprodutível</a:t>
-            </a:r>
+              <a:rPr dirty="0"/>
+              <a:t>**</a:t>
+            </a:r>
+            <a:r>
+              <a:rPr dirty="0" err="1"/>
+              <a:t>Achado-chave</a:t>
+            </a:r>
+            <a:r>
+              <a:rPr dirty="0"/>
+              <a:t>**: 2 '</a:t>
+            </a:r>
+            <a:r>
+              <a:rPr dirty="0" err="1"/>
+              <a:t>recordistas</a:t>
+            </a:r>
+            <a:r>
+              <a:rPr dirty="0"/>
+              <a:t> de </a:t>
+            </a:r>
+            <a:r>
+              <a:rPr dirty="0" err="1"/>
+              <a:t>estabilidade</a:t>
+            </a:r>
+            <a:r>
+              <a:rPr dirty="0"/>
+              <a:t>' de </a:t>
+            </a:r>
+            <a:r>
+              <a:rPr dirty="0" err="1"/>
+              <a:t>réplica</a:t>
+            </a:r>
+            <a:r>
+              <a:rPr dirty="0"/>
+              <a:t> </a:t>
+            </a:r>
+            <a:r>
+              <a:rPr dirty="0" err="1"/>
+              <a:t>única</a:t>
+            </a:r>
+            <a:r>
+              <a:rPr dirty="0"/>
+              <a:t> (RLREELKKAEEWLEKRRKEE 0,294 nm; VRTRR 0,194 nm) </a:t>
+            </a:r>
+            <a:r>
+              <a:rPr dirty="0" err="1"/>
+              <a:t>mostraram</a:t>
+            </a:r>
+            <a:r>
+              <a:rPr dirty="0"/>
+              <a:t> DP real de 0,606 nm e 0,360 nm — </a:t>
+            </a:r>
+            <a:r>
+              <a:rPr dirty="0" err="1"/>
+              <a:t>resultado</a:t>
+            </a:r>
+            <a:r>
+              <a:rPr dirty="0"/>
+              <a:t> NÃO </a:t>
+            </a:r>
+            <a:r>
+              <a:rPr dirty="0" err="1"/>
+              <a:t>reprodutível</a:t>
+            </a:r>
+            <a:endParaRPr dirty="0"/>
           </a:p>
           <a:p>
             <a:pPr>
@@ -3893,7 +4526,40 @@
               </a:defRPr>
             </a:pPr>
             <a:r>
-              <a:t>**Apenas 4 candidatos confirmam estabilidade real** (DP &lt; 0,05 nm): SRTRR, VRYRR, VRRPR, HRPRRPR</a:t>
+              <a:rPr dirty="0"/>
+              <a:t>**</a:t>
+            </a:r>
+            <a:r>
+              <a:rPr dirty="0" err="1"/>
+              <a:t>Apenas</a:t>
+            </a:r>
+            <a:r>
+              <a:rPr dirty="0"/>
+              <a:t> 4 </a:t>
+            </a:r>
+            <a:r>
+              <a:rPr dirty="0" err="1"/>
+              <a:t>candidatos</a:t>
+            </a:r>
+            <a:r>
+              <a:rPr dirty="0"/>
+              <a:t> </a:t>
+            </a:r>
+            <a:r>
+              <a:rPr dirty="0" err="1"/>
+              <a:t>confirmam</a:t>
+            </a:r>
+            <a:r>
+              <a:rPr dirty="0"/>
+              <a:t> </a:t>
+            </a:r>
+            <a:r>
+              <a:rPr dirty="0" err="1"/>
+              <a:t>estabilidade</a:t>
+            </a:r>
+            <a:r>
+              <a:rPr dirty="0"/>
+              <a:t> real** (DP &lt; 0,05 nm): SRTRR, VRYRR, VRRPR, HRPRRPR</a:t>
             </a:r>
           </a:p>
           <a:p>
@@ -3911,8 +4577,66 @@
               </a:defRPr>
             </a:pPr>
             <a:r>
-              <a:t>Conclusão: estabilidade em réplica única não é confiável isoladamente</a:t>
-            </a:r>
+              <a:rPr dirty="0" err="1"/>
+              <a:t>Conclusão</a:t>
+            </a:r>
+            <a:r>
+              <a:rPr dirty="0"/>
+              <a:t>: </a:t>
+            </a:r>
+            <a:r>
+              <a:rPr dirty="0" err="1"/>
+              <a:t>estabilidade</a:t>
+            </a:r>
+            <a:r>
+              <a:rPr dirty="0"/>
+              <a:t> </a:t>
+            </a:r>
+            <a:r>
+              <a:rPr dirty="0" err="1"/>
+              <a:t>em</a:t>
+            </a:r>
+            <a:r>
+              <a:rPr dirty="0"/>
+              <a:t> </a:t>
+            </a:r>
+            <a:r>
+              <a:rPr dirty="0" err="1"/>
+              <a:t>réplica</a:t>
+            </a:r>
+            <a:r>
+              <a:rPr dirty="0"/>
+              <a:t> </a:t>
+            </a:r>
+            <a:r>
+              <a:rPr dirty="0" err="1"/>
+              <a:t>única</a:t>
+            </a:r>
+            <a:r>
+              <a:rPr dirty="0"/>
+              <a:t> </a:t>
+            </a:r>
+            <a:r>
+              <a:rPr dirty="0" err="1"/>
+              <a:t>não</a:t>
+            </a:r>
+            <a:r>
+              <a:rPr dirty="0"/>
+              <a:t> é </a:t>
+            </a:r>
+            <a:r>
+              <a:rPr dirty="0" err="1"/>
+              <a:t>confiável</a:t>
+            </a:r>
+            <a:r>
+              <a:rPr dirty="0"/>
+              <a:t> </a:t>
+            </a:r>
+            <a:r>
+              <a:rPr dirty="0" err="1"/>
+              <a:t>isoladamente</a:t>
+            </a:r>
+            <a:endParaRPr dirty="0"/>
           </a:p>
         </p:txBody>
       </p:sp>
@@ -3958,6 +4682,7 @@
           <a:lstStyle/>
           <a:p>
             <a:pPr algn="ctr"/>
+            <a:endParaRPr/>
           </a:p>
         </p:txBody>
       </p:sp>
@@ -3994,7 +4719,7 @@
 </file>
 
 <file path=ppt/slides/slide14.xml><?xml version="1.0" encoding="utf-8"?>
-<p:sld xmlns:a="http://schemas.openxmlformats.org/drawingml/2006/main" xmlns:p="http://schemas.openxmlformats.org/presentationml/2006/main" xmlns:r="http://schemas.openxmlformats.org/officeDocument/2006/relationships">
+<p:sld xmlns:a="http://schemas.openxmlformats.org/drawingml/2006/main" xmlns:r="http://schemas.openxmlformats.org/officeDocument/2006/relationships" xmlns:p="http://schemas.openxmlformats.org/presentationml/2006/main">
   <p:cSld>
     <p:bg>
       <p:bgPr>
@@ -4010,7 +4735,14 @@
         <p:cNvGrpSpPr/>
         <p:nvPr/>
       </p:nvGrpSpPr>
-      <p:grpSpPr/>
+      <p:grpSpPr>
+        <a:xfrm>
+          <a:off x="0" y="0"/>
+          <a:ext cx="0" cy="0"/>
+          <a:chOff x="0" y="0"/>
+          <a:chExt cx="0" cy="0"/>
+        </a:xfrm>
+      </p:grpSpPr>
       <p:sp>
         <p:nvSpPr>
           <p:cNvPr id="2" name="TextBox 1"/>
@@ -4054,7 +4786,7 @@
         </p:nvSpPr>
         <p:spPr>
           <a:xfrm>
-            <a:off x="640080" y="1005840"/>
+            <a:off x="566928" y="1682496"/>
             <a:ext cx="5303520" cy="4572000"/>
           </a:xfrm>
           <a:prstGeom prst="rect">
@@ -4082,7 +4814,68 @@
               </a:defRPr>
             </a:pPr>
             <a:r>
-              <a:t>Análise de ocupância: % de frames em que peptídeo permanece no bolso S1 (raios 4/5/6 Å)</a:t>
+              <a:rPr dirty="0" err="1"/>
+              <a:t>Análise</a:t>
+            </a:r>
+            <a:r>
+              <a:rPr dirty="0"/>
+              <a:t> de </a:t>
+            </a:r>
+            <a:r>
+              <a:rPr dirty="0" err="1"/>
+              <a:t>ocupância</a:t>
+            </a:r>
+            <a:r>
+              <a:rPr dirty="0"/>
+              <a:t>: % de frames </a:t>
+            </a:r>
+            <a:r>
+              <a:rPr dirty="0" err="1"/>
+              <a:t>em</a:t>
+            </a:r>
+            <a:r>
+              <a:rPr dirty="0"/>
+              <a:t> </a:t>
+            </a:r>
+            <a:r>
+              <a:rPr dirty="0" err="1"/>
+              <a:t>que</a:t>
+            </a:r>
+            <a:r>
+              <a:rPr dirty="0"/>
+              <a:t> </a:t>
+            </a:r>
+            <a:r>
+              <a:rPr dirty="0" err="1"/>
+              <a:t>peptídeo</a:t>
+            </a:r>
+            <a:r>
+              <a:rPr dirty="0"/>
+              <a:t> </a:t>
+            </a:r>
+            <a:r>
+              <a:rPr dirty="0" err="1"/>
+              <a:t>permanece</a:t>
+            </a:r>
+            <a:r>
+              <a:rPr dirty="0"/>
+              <a:t> no </a:t>
+            </a:r>
+            <a:r>
+              <a:rPr dirty="0" err="1"/>
+              <a:t>bolso</a:t>
+            </a:r>
+            <a:r>
+              <a:rPr dirty="0"/>
+              <a:t> S1 (</a:t>
+            </a:r>
+            <a:r>
+              <a:rPr dirty="0" err="1"/>
+              <a:t>raios</a:t>
+            </a:r>
+            <a:r>
+              <a:rPr dirty="0"/>
+              <a:t> 4/5/6 Å)</a:t>
             </a:r>
           </a:p>
           <a:p>
@@ -4100,7 +4893,56 @@
               </a:defRPr>
             </a:pPr>
             <a:r>
-              <a:t>**VRRPR paradoxo**: RMSD global estável (0,268 nm, DP 0,01 nm), MAS ocupância a 6 Å cai dramáticamente entre réplicas (67,6% → 32,9% → 0,15%)</a:t>
+              <a:rPr dirty="0"/>
+              <a:t>**VRRPR </a:t>
+            </a:r>
+            <a:r>
+              <a:rPr dirty="0" err="1"/>
+              <a:t>paradoxo</a:t>
+            </a:r>
+            <a:r>
+              <a:rPr dirty="0"/>
+              <a:t>**: RMSD global </a:t>
+            </a:r>
+            <a:r>
+              <a:rPr dirty="0" err="1"/>
+              <a:t>estável</a:t>
+            </a:r>
+            <a:r>
+              <a:rPr dirty="0"/>
+              <a:t> (0,268 nm, DP 0,01 nm), MAS </a:t>
+            </a:r>
+            <a:r>
+              <a:rPr dirty="0" err="1"/>
+              <a:t>ocupância</a:t>
+            </a:r>
+            <a:r>
+              <a:rPr dirty="0"/>
+              <a:t> a 6 Å </a:t>
+            </a:r>
+            <a:r>
+              <a:rPr dirty="0" err="1"/>
+              <a:t>cai</a:t>
+            </a:r>
+            <a:r>
+              <a:rPr dirty="0"/>
+              <a:t> </a:t>
+            </a:r>
+            <a:r>
+              <a:rPr dirty="0" err="1"/>
+              <a:t>dramáticamente</a:t>
+            </a:r>
+            <a:r>
+              <a:rPr dirty="0"/>
+              <a:t> entre </a:t>
+            </a:r>
+            <a:r>
+              <a:rPr dirty="0" err="1"/>
+              <a:t>réplicas</a:t>
+            </a:r>
+            <a:r>
+              <a:rPr dirty="0"/>
+              <a:t> (67,6% → 32,9% → 0,15%)</a:t>
             </a:r>
           </a:p>
           <a:p>
@@ -4118,8 +4960,62 @@
               </a:defRPr>
             </a:pPr>
             <a:r>
-              <a:t>**VRYRR destaque**: ocupância ~100% mesmo no corte mais estrito (4 Å), salt-bridge real (Lys-Asp) nas 3 réplicas</a:t>
-            </a:r>
+              <a:rPr dirty="0"/>
+              <a:t>**VRYRR </a:t>
+            </a:r>
+            <a:r>
+              <a:rPr dirty="0" err="1"/>
+              <a:t>destaque</a:t>
+            </a:r>
+            <a:r>
+              <a:rPr dirty="0"/>
+              <a:t>**: </a:t>
+            </a:r>
+            <a:r>
+              <a:rPr dirty="0" err="1"/>
+              <a:t>ocupância</a:t>
+            </a:r>
+            <a:r>
+              <a:rPr dirty="0"/>
+              <a:t> ~100% </a:t>
+            </a:r>
+            <a:r>
+              <a:rPr dirty="0" err="1"/>
+              <a:t>mesmo</a:t>
+            </a:r>
+            <a:r>
+              <a:rPr dirty="0"/>
+              <a:t> no corte </a:t>
+            </a:r>
+            <a:r>
+              <a:rPr dirty="0" err="1"/>
+              <a:t>mais</a:t>
+            </a:r>
+            <a:r>
+              <a:rPr dirty="0"/>
+              <a:t> </a:t>
+            </a:r>
+            <a:r>
+              <a:rPr dirty="0" err="1"/>
+              <a:t>estrito</a:t>
+            </a:r>
+            <a:r>
+              <a:rPr dirty="0"/>
+              <a:t> (4 Å), salt-bridge real (Lys-Asp) </a:t>
+            </a:r>
+            <a:r>
+              <a:rPr dirty="0" err="1"/>
+              <a:t>nas</a:t>
+            </a:r>
+            <a:r>
+              <a:rPr dirty="0"/>
+              <a:t> 3 </a:t>
+            </a:r>
+            <a:r>
+              <a:rPr dirty="0" err="1"/>
+              <a:t>réplicas</a:t>
+            </a:r>
+            <a:endParaRPr dirty="0"/>
           </a:p>
           <a:p>
             <a:pPr>
@@ -4136,8 +5032,66 @@
               </a:defRPr>
             </a:pPr>
             <a:r>
-              <a:t>Conclusão: baixa variância estrutural ≠ permanência funcional no sítio catalítico</a:t>
-            </a:r>
+              <a:rPr dirty="0" err="1"/>
+              <a:t>Conclusão</a:t>
+            </a:r>
+            <a:r>
+              <a:rPr dirty="0"/>
+              <a:t>: </a:t>
+            </a:r>
+            <a:r>
+              <a:rPr dirty="0" err="1"/>
+              <a:t>baixa</a:t>
+            </a:r>
+            <a:r>
+              <a:rPr dirty="0"/>
+              <a:t> </a:t>
+            </a:r>
+            <a:r>
+              <a:rPr dirty="0" err="1"/>
+              <a:t>variância</a:t>
+            </a:r>
+            <a:r>
+              <a:rPr dirty="0"/>
+              <a:t> </a:t>
+            </a:r>
+            <a:r>
+              <a:rPr dirty="0" err="1"/>
+              <a:t>estrutural</a:t>
+            </a:r>
+            <a:r>
+              <a:rPr dirty="0"/>
+              <a:t> ≠ </a:t>
+            </a:r>
+            <a:r>
+              <a:rPr dirty="0" err="1"/>
+              <a:t>permanência</a:t>
+            </a:r>
+            <a:r>
+              <a:rPr dirty="0"/>
+              <a:t> </a:t>
+            </a:r>
+            <a:r>
+              <a:rPr dirty="0" err="1"/>
+              <a:t>funcional</a:t>
+            </a:r>
+            <a:r>
+              <a:rPr dirty="0"/>
+              <a:t> no </a:t>
+            </a:r>
+            <a:r>
+              <a:rPr dirty="0" err="1"/>
+              <a:t>sítio</a:t>
+            </a:r>
+            <a:r>
+              <a:rPr dirty="0"/>
+              <a:t> </a:t>
+            </a:r>
+            <a:r>
+              <a:rPr dirty="0" err="1"/>
+              <a:t>catalítico</a:t>
+            </a:r>
+            <a:endParaRPr dirty="0"/>
           </a:p>
         </p:txBody>
       </p:sp>
@@ -4183,6 +5137,7 @@
           <a:lstStyle/>
           <a:p>
             <a:pPr algn="ctr"/>
+            <a:endParaRPr/>
           </a:p>
         </p:txBody>
       </p:sp>
@@ -4219,7 +5174,7 @@
 </file>
 
 <file path=ppt/slides/slide15.xml><?xml version="1.0" encoding="utf-8"?>
-<p:sld xmlns:a="http://schemas.openxmlformats.org/drawingml/2006/main" xmlns:p="http://schemas.openxmlformats.org/presentationml/2006/main" xmlns:r="http://schemas.openxmlformats.org/officeDocument/2006/relationships">
+<p:sld xmlns:a="http://schemas.openxmlformats.org/drawingml/2006/main" xmlns:r="http://schemas.openxmlformats.org/officeDocument/2006/relationships" xmlns:p="http://schemas.openxmlformats.org/presentationml/2006/main">
   <p:cSld>
     <p:bg>
       <p:bgPr>
@@ -4235,7 +5190,14 @@
         <p:cNvGrpSpPr/>
         <p:nvPr/>
       </p:nvGrpSpPr>
-      <p:grpSpPr/>
+      <p:grpSpPr>
+        <a:xfrm>
+          <a:off x="0" y="0"/>
+          <a:ext cx="0" cy="0"/>
+          <a:chOff x="0" y="0"/>
+          <a:chExt cx="0" cy="0"/>
+        </a:xfrm>
+      </p:grpSpPr>
       <p:sp>
         <p:nvSpPr>
           <p:cNvPr id="2" name="TextBox 1"/>
@@ -4426,6 +5388,7 @@
           <a:lstStyle/>
           <a:p>
             <a:pPr algn="ctr"/>
+            <a:endParaRPr/>
           </a:p>
         </p:txBody>
       </p:sp>
@@ -4438,7 +5401,7 @@
 </file>
 
 <file path=ppt/slides/slide16.xml><?xml version="1.0" encoding="utf-8"?>
-<p:sld xmlns:a="http://schemas.openxmlformats.org/drawingml/2006/main" xmlns:p="http://schemas.openxmlformats.org/presentationml/2006/main" xmlns:r="http://schemas.openxmlformats.org/officeDocument/2006/relationships">
+<p:sld xmlns:a="http://schemas.openxmlformats.org/drawingml/2006/main" xmlns:r="http://schemas.openxmlformats.org/officeDocument/2006/relationships" xmlns:p="http://schemas.openxmlformats.org/presentationml/2006/main">
   <p:cSld>
     <p:bg>
       <p:bgPr>
@@ -4454,7 +5417,14 @@
         <p:cNvGrpSpPr/>
         <p:nvPr/>
       </p:nvGrpSpPr>
-      <p:grpSpPr/>
+      <p:grpSpPr>
+        <a:xfrm>
+          <a:off x="0" y="0"/>
+          <a:ext cx="0" cy="0"/>
+          <a:chOff x="0" y="0"/>
+          <a:chExt cx="0" cy="0"/>
+        </a:xfrm>
+      </p:grpSpPr>
       <p:sp>
         <p:nvSpPr>
           <p:cNvPr id="2" name="TextBox 1"/>
@@ -4498,7 +5468,7 @@
         </p:nvSpPr>
         <p:spPr>
           <a:xfrm>
-            <a:off x="640080" y="1005840"/>
+            <a:off x="557784" y="1837944"/>
             <a:ext cx="5303520" cy="4572000"/>
           </a:xfrm>
           <a:prstGeom prst="rect">
@@ -4526,7 +5496,12 @@
               </a:defRPr>
             </a:pPr>
             <a:r>
-              <a:t>Sequência: VRYRR (5 aa)</a:t>
+              <a:rPr dirty="0" err="1"/>
+              <a:t>Sequência</a:t>
+            </a:r>
+            <a:r>
+              <a:rPr dirty="0"/>
+              <a:t>: VRYRR (5 aa)</a:t>
             </a:r>
           </a:p>
           <a:p>
@@ -4544,8 +5519,22 @@
               </a:defRPr>
             </a:pPr>
             <a:r>
-              <a:t>RMSD: 0,1985 nm (DP 0,0134 nm) — muito estável</a:t>
-            </a:r>
+              <a:rPr dirty="0"/>
+              <a:t>RMSD: 0,1985 nm (DP 0,0134 nm) — </a:t>
+            </a:r>
+            <a:r>
+              <a:rPr dirty="0" err="1"/>
+              <a:t>muito</a:t>
+            </a:r>
+            <a:r>
+              <a:rPr dirty="0"/>
+              <a:t> </a:t>
+            </a:r>
+            <a:r>
+              <a:rPr dirty="0" err="1"/>
+              <a:t>estável</a:t>
+            </a:r>
+            <a:endParaRPr dirty="0"/>
           </a:p>
           <a:p>
             <a:pPr>
@@ -4562,6 +5551,7 @@
               </a:defRPr>
             </a:pPr>
             <a:r>
+              <a:rPr dirty="0"/>
               <a:t>Vina: −10,22 kcal/mol</a:t>
             </a:r>
           </a:p>
@@ -4580,8 +5570,46 @@
               </a:defRPr>
             </a:pPr>
             <a:r>
-              <a:t>**Ocupância S1 @ 4 Å: ~100%** — salt-bridge Lys(peptídeo)–Asp187(bolso) nas 3 réplicas</a:t>
-            </a:r>
+              <a:rPr dirty="0"/>
+              <a:t>**</a:t>
+            </a:r>
+            <a:r>
+              <a:rPr dirty="0" err="1"/>
+              <a:t>Ocupância</a:t>
+            </a:r>
+            <a:r>
+              <a:rPr dirty="0"/>
+              <a:t> S1 @ 4 Å: ~100%** — salt-bridge Lys(</a:t>
+            </a:r>
+            <a:r>
+              <a:rPr dirty="0" err="1"/>
+              <a:t>peptídeo</a:t>
+            </a:r>
+            <a:r>
+              <a:rPr dirty="0"/>
+              <a:t>)–Asp187(</a:t>
+            </a:r>
+            <a:r>
+              <a:rPr dirty="0" err="1"/>
+              <a:t>bolso</a:t>
+            </a:r>
+            <a:r>
+              <a:rPr dirty="0"/>
+              <a:t>) </a:t>
+            </a:r>
+            <a:r>
+              <a:rPr dirty="0" err="1"/>
+              <a:t>nas</a:t>
+            </a:r>
+            <a:r>
+              <a:rPr dirty="0"/>
+              <a:t> 3 </a:t>
+            </a:r>
+            <a:r>
+              <a:rPr dirty="0" err="1"/>
+              <a:t>réplicas</a:t>
+            </a:r>
+            <a:endParaRPr dirty="0"/>
           </a:p>
           <a:p>
             <a:pPr>
@@ -4598,7 +5626,16 @@
               </a:defRPr>
             </a:pPr>
             <a:r>
-              <a:t>SI mínimo: 0,92 kcal/mol</a:t>
+              <a:rPr dirty="0"/>
+              <a:t>SI </a:t>
+            </a:r>
+            <a:r>
+              <a:rPr dirty="0" err="1"/>
+              <a:t>mínimo</a:t>
+            </a:r>
+            <a:r>
+              <a:rPr dirty="0"/>
+              <a:t>: 0,92 kcal/mol</a:t>
             </a:r>
           </a:p>
         </p:txBody>
@@ -4645,6 +5682,7 @@
           <a:lstStyle/>
           <a:p>
             <a:pPr algn="ctr"/>
+            <a:endParaRPr/>
           </a:p>
         </p:txBody>
       </p:sp>
@@ -4657,7 +5695,7 @@
 </file>
 
 <file path=ppt/slides/slide17.xml><?xml version="1.0" encoding="utf-8"?>
-<p:sld xmlns:a="http://schemas.openxmlformats.org/drawingml/2006/main" xmlns:p="http://schemas.openxmlformats.org/presentationml/2006/main" xmlns:r="http://schemas.openxmlformats.org/officeDocument/2006/relationships">
+<p:sld xmlns:a="http://schemas.openxmlformats.org/drawingml/2006/main" xmlns:r="http://schemas.openxmlformats.org/officeDocument/2006/relationships" xmlns:p="http://schemas.openxmlformats.org/presentationml/2006/main">
   <p:cSld>
     <p:bg>
       <p:bgPr>
@@ -4673,7 +5711,14 @@
         <p:cNvGrpSpPr/>
         <p:nvPr/>
       </p:nvGrpSpPr>
-      <p:grpSpPr/>
+      <p:grpSpPr>
+        <a:xfrm>
+          <a:off x="0" y="0"/>
+          <a:ext cx="0" cy="0"/>
+          <a:chOff x="0" y="0"/>
+          <a:chExt cx="0" cy="0"/>
+        </a:xfrm>
+      </p:grpSpPr>
       <p:sp>
         <p:nvSpPr>
           <p:cNvPr id="2" name="TextBox 1"/>
@@ -4717,7 +5762,7 @@
         </p:nvSpPr>
         <p:spPr>
           <a:xfrm>
-            <a:off x="640080" y="1005840"/>
+            <a:off x="640080" y="1408176"/>
             <a:ext cx="5303520" cy="4572000"/>
           </a:xfrm>
           <a:prstGeom prst="rect">
@@ -4745,7 +5790,12 @@
               </a:defRPr>
             </a:pPr>
             <a:r>
-              <a:t>Sequência: HRPRRPR (7 aa)</a:t>
+              <a:rPr dirty="0" err="1"/>
+              <a:t>Sequência</a:t>
+            </a:r>
+            <a:r>
+              <a:rPr dirty="0"/>
+              <a:t>: HRPRRPR (7 aa)</a:t>
             </a:r>
           </a:p>
           <a:p>
@@ -4763,8 +5813,14 @@
               </a:defRPr>
             </a:pPr>
             <a:r>
-              <a:t>RMSD: 0,2659 nm (DP 0,0181 nm) — estável</a:t>
-            </a:r>
+              <a:rPr dirty="0"/>
+              <a:t>RMSD: 0,2659 nm (DP 0,0181 nm) — </a:t>
+            </a:r>
+            <a:r>
+              <a:rPr dirty="0" err="1"/>
+              <a:t>estável</a:t>
+            </a:r>
+            <a:endParaRPr dirty="0"/>
           </a:p>
           <a:p>
             <a:pPr>
@@ -4781,7 +5837,32 @@
               </a:defRPr>
             </a:pPr>
             <a:r>
-              <a:t>Vina: −11,72 kcal/mol (segunda melhor afinidade do TOP-13)</a:t>
+              <a:rPr dirty="0"/>
+              <a:t>Vina: −11,72 kcal/mol (</a:t>
+            </a:r>
+            <a:r>
+              <a:rPr dirty="0" err="1"/>
+              <a:t>segunda</a:t>
+            </a:r>
+            <a:r>
+              <a:rPr dirty="0"/>
+              <a:t> </a:t>
+            </a:r>
+            <a:r>
+              <a:rPr dirty="0" err="1"/>
+              <a:t>melhor</a:t>
+            </a:r>
+            <a:r>
+              <a:rPr dirty="0"/>
+              <a:t> </a:t>
+            </a:r>
+            <a:r>
+              <a:rPr dirty="0" err="1"/>
+              <a:t>afinidade</a:t>
+            </a:r>
+            <a:r>
+              <a:rPr dirty="0"/>
+              <a:t> do TOP-13)</a:t>
             </a:r>
           </a:p>
           <a:p>
@@ -4799,7 +5880,12 @@
               </a:defRPr>
             </a:pPr>
             <a:r>
-              <a:t>Ocupância S1 @ 6 Å: ~75%</a:t>
+              <a:rPr dirty="0" err="1"/>
+              <a:t>Ocupância</a:t>
+            </a:r>
+            <a:r>
+              <a:rPr dirty="0"/>
+              <a:t> S1 @ 6 Å: ~75%</a:t>
             </a:r>
           </a:p>
           <a:p>
@@ -4817,7 +5903,32 @@
               </a:defRPr>
             </a:pPr>
             <a:r>
-              <a:t>SI mínimo: 1,41 kcal/mol (melhor especificidade entre 7 aa)</a:t>
+              <a:rPr dirty="0"/>
+              <a:t>SI </a:t>
+            </a:r>
+            <a:r>
+              <a:rPr dirty="0" err="1"/>
+              <a:t>mínimo</a:t>
+            </a:r>
+            <a:r>
+              <a:rPr dirty="0"/>
+              <a:t>: 1,41 kcal/mol (</a:t>
+            </a:r>
+            <a:r>
+              <a:rPr dirty="0" err="1"/>
+              <a:t>melhor</a:t>
+            </a:r>
+            <a:r>
+              <a:rPr dirty="0"/>
+              <a:t> </a:t>
+            </a:r>
+            <a:r>
+              <a:rPr dirty="0" err="1"/>
+              <a:t>especificidade</a:t>
+            </a:r>
+            <a:r>
+              <a:rPr dirty="0"/>
+              <a:t> entre 7 aa)</a:t>
             </a:r>
           </a:p>
         </p:txBody>
@@ -4864,6 +5975,7 @@
           <a:lstStyle/>
           <a:p>
             <a:pPr algn="ctr"/>
+            <a:endParaRPr/>
           </a:p>
         </p:txBody>
       </p:sp>
@@ -4876,7 +5988,7 @@
 </file>
 
 <file path=ppt/slides/slide18.xml><?xml version="1.0" encoding="utf-8"?>
-<p:sld xmlns:a="http://schemas.openxmlformats.org/drawingml/2006/main" xmlns:p="http://schemas.openxmlformats.org/presentationml/2006/main" xmlns:r="http://schemas.openxmlformats.org/officeDocument/2006/relationships">
+<p:sld xmlns:a="http://schemas.openxmlformats.org/drawingml/2006/main" xmlns:r="http://schemas.openxmlformats.org/officeDocument/2006/relationships" xmlns:p="http://schemas.openxmlformats.org/presentationml/2006/main">
   <p:cSld>
     <p:bg>
       <p:bgPr>
@@ -4892,7 +6004,14 @@
         <p:cNvGrpSpPr/>
         <p:nvPr/>
       </p:nvGrpSpPr>
-      <p:grpSpPr/>
+      <p:grpSpPr>
+        <a:xfrm>
+          <a:off x="0" y="0"/>
+          <a:ext cx="0" cy="0"/>
+          <a:chOff x="0" y="0"/>
+          <a:chExt cx="0" cy="0"/>
+        </a:xfrm>
+      </p:grpSpPr>
       <p:sp>
         <p:nvSpPr>
           <p:cNvPr id="2" name="TextBox 1"/>
@@ -5065,6 +6184,7 @@
           <a:lstStyle/>
           <a:p>
             <a:pPr algn="ctr"/>
+            <a:endParaRPr/>
           </a:p>
         </p:txBody>
       </p:sp>
@@ -5101,7 +6221,7 @@
 </file>
 
 <file path=ppt/slides/slide19.xml><?xml version="1.0" encoding="utf-8"?>
-<p:sld xmlns:a="http://schemas.openxmlformats.org/drawingml/2006/main" xmlns:p="http://schemas.openxmlformats.org/presentationml/2006/main" xmlns:r="http://schemas.openxmlformats.org/officeDocument/2006/relationships">
+<p:sld xmlns:a="http://schemas.openxmlformats.org/drawingml/2006/main" xmlns:r="http://schemas.openxmlformats.org/officeDocument/2006/relationships" xmlns:p="http://schemas.openxmlformats.org/presentationml/2006/main">
   <p:cSld>
     <p:bg>
       <p:bgPr>
@@ -5117,7 +6237,14 @@
         <p:cNvGrpSpPr/>
         <p:nvPr/>
       </p:nvGrpSpPr>
-      <p:grpSpPr/>
+      <p:grpSpPr>
+        <a:xfrm>
+          <a:off x="0" y="0"/>
+          <a:ext cx="0" cy="0"/>
+          <a:chOff x="0" y="0"/>
+          <a:chExt cx="0" cy="0"/>
+        </a:xfrm>
+      </p:grpSpPr>
       <p:sp>
         <p:nvSpPr>
           <p:cNvPr id="2" name="TextBox 1"/>
@@ -5161,7 +6288,7 @@
         </p:nvSpPr>
         <p:spPr>
           <a:xfrm>
-            <a:off x="640080" y="1005840"/>
+            <a:off x="640080" y="1709928"/>
             <a:ext cx="5303520" cy="4572000"/>
           </a:xfrm>
           <a:prstGeom prst="rect">
@@ -5189,8 +6316,70 @@
               </a:defRPr>
             </a:pPr>
             <a:r>
-              <a:t>**Especificidade**: 0/23 candidatos aprovados (SI ≥ 2,0 kcal/mol) — margem de seletividade insuficiente frente a não-alvos</a:t>
-            </a:r>
+              <a:rPr dirty="0"/>
+              <a:t>**</a:t>
+            </a:r>
+            <a:r>
+              <a:rPr dirty="0" err="1"/>
+              <a:t>Especificidade</a:t>
+            </a:r>
+            <a:r>
+              <a:rPr dirty="0"/>
+              <a:t>**: 0/23 </a:t>
+            </a:r>
+            <a:r>
+              <a:rPr dirty="0" err="1"/>
+              <a:t>candidatos</a:t>
+            </a:r>
+            <a:r>
+              <a:rPr dirty="0"/>
+              <a:t> </a:t>
+            </a:r>
+            <a:r>
+              <a:rPr dirty="0" err="1"/>
+              <a:t>aprovados</a:t>
+            </a:r>
+            <a:r>
+              <a:rPr dirty="0"/>
+              <a:t> (SI ≥ 2,0 kcal/mol) — </a:t>
+            </a:r>
+            <a:r>
+              <a:rPr dirty="0" err="1"/>
+              <a:t>margem</a:t>
+            </a:r>
+            <a:r>
+              <a:rPr dirty="0"/>
+              <a:t> de </a:t>
+            </a:r>
+            <a:r>
+              <a:rPr dirty="0" err="1"/>
+              <a:t>seletividade</a:t>
+            </a:r>
+            <a:r>
+              <a:rPr dirty="0"/>
+              <a:t> </a:t>
+            </a:r>
+            <a:r>
+              <a:rPr dirty="0" err="1"/>
+              <a:t>insuficiente</a:t>
+            </a:r>
+            <a:r>
+              <a:rPr dirty="0"/>
+              <a:t> </a:t>
+            </a:r>
+            <a:r>
+              <a:rPr dirty="0" err="1"/>
+              <a:t>frente</a:t>
+            </a:r>
+            <a:r>
+              <a:rPr dirty="0"/>
+              <a:t> a </a:t>
+            </a:r>
+            <a:r>
+              <a:rPr dirty="0" err="1"/>
+              <a:t>não-alvos</a:t>
+            </a:r>
+            <a:endParaRPr dirty="0"/>
           </a:p>
           <a:p>
             <a:pPr>
@@ -5207,7 +6396,56 @@
               </a:defRPr>
             </a:pPr>
             <a:r>
-              <a:t>**Resistência proteolítica**: 0/20 top-20 resistentes a autoclivagem por P1-internos básicos (K/R)</a:t>
+              <a:rPr dirty="0"/>
+              <a:t>**</a:t>
+            </a:r>
+            <a:r>
+              <a:rPr dirty="0" err="1"/>
+              <a:t>Resistência</a:t>
+            </a:r>
+            <a:r>
+              <a:rPr dirty="0"/>
+              <a:t> </a:t>
+            </a:r>
+            <a:r>
+              <a:rPr dirty="0" err="1"/>
+              <a:t>proteolítica</a:t>
+            </a:r>
+            <a:r>
+              <a:rPr dirty="0"/>
+              <a:t>**: 0/20 top-20 </a:t>
+            </a:r>
+            <a:r>
+              <a:rPr dirty="0" err="1"/>
+              <a:t>resistentes</a:t>
+            </a:r>
+            <a:r>
+              <a:rPr dirty="0"/>
+              <a:t> a </a:t>
+            </a:r>
+            <a:r>
+              <a:rPr dirty="0" err="1"/>
+              <a:t>autoclivagem</a:t>
+            </a:r>
+            <a:r>
+              <a:rPr dirty="0"/>
+              <a:t> </a:t>
+            </a:r>
+            <a:r>
+              <a:rPr dirty="0" err="1"/>
+              <a:t>por</a:t>
+            </a:r>
+            <a:r>
+              <a:rPr dirty="0"/>
+              <a:t> P1-internos </a:t>
+            </a:r>
+            <a:r>
+              <a:rPr dirty="0" err="1"/>
+              <a:t>básicos</a:t>
+            </a:r>
+            <a:r>
+              <a:rPr dirty="0"/>
+              <a:t> (K/R)</a:t>
             </a:r>
           </a:p>
           <a:p>
@@ -5225,8 +6463,66 @@
               </a:defRPr>
             </a:pPr>
             <a:r>
-              <a:t>Candidato SEEEVLAANEAYAAAHTAYN: ausência de P1-internos (resistência estrutural real), MAS sem margem de especificidade comprovada</a:t>
-            </a:r>
+              <a:rPr dirty="0" err="1"/>
+              <a:t>Candidato</a:t>
+            </a:r>
+            <a:r>
+              <a:rPr dirty="0"/>
+              <a:t> SEEEVLAANEAYAAAHTAYN: </a:t>
+            </a:r>
+            <a:r>
+              <a:rPr dirty="0" err="1"/>
+              <a:t>ausência</a:t>
+            </a:r>
+            <a:r>
+              <a:rPr dirty="0"/>
+              <a:t> de P1-internos (</a:t>
+            </a:r>
+            <a:r>
+              <a:rPr dirty="0" err="1"/>
+              <a:t>resistência</a:t>
+            </a:r>
+            <a:r>
+              <a:rPr dirty="0"/>
+              <a:t> </a:t>
+            </a:r>
+            <a:r>
+              <a:rPr dirty="0" err="1"/>
+              <a:t>estrutural</a:t>
+            </a:r>
+            <a:r>
+              <a:rPr dirty="0"/>
+              <a:t> real), MAS </a:t>
+            </a:r>
+            <a:r>
+              <a:rPr dirty="0" err="1"/>
+              <a:t>sem</a:t>
+            </a:r>
+            <a:r>
+              <a:rPr dirty="0"/>
+              <a:t> </a:t>
+            </a:r>
+            <a:r>
+              <a:rPr dirty="0" err="1"/>
+              <a:t>margem</a:t>
+            </a:r>
+            <a:r>
+              <a:rPr dirty="0"/>
+              <a:t> de </a:t>
+            </a:r>
+            <a:r>
+              <a:rPr dirty="0" err="1"/>
+              <a:t>especificidade</a:t>
+            </a:r>
+            <a:r>
+              <a:rPr dirty="0"/>
+              <a:t> </a:t>
+            </a:r>
+            <a:r>
+              <a:rPr dirty="0" err="1"/>
+              <a:t>comprovada</a:t>
+            </a:r>
+            <a:endParaRPr dirty="0"/>
           </a:p>
           <a:p>
             <a:pPr>
@@ -5243,8 +6539,54 @@
               </a:defRPr>
             </a:pPr>
             <a:r>
-              <a:t>Ambos bloqueadores precisam ser resolvidos simultaneamente para aprovação de síntese</a:t>
-            </a:r>
+              <a:rPr dirty="0"/>
+              <a:t>Ambos </a:t>
+            </a:r>
+            <a:r>
+              <a:rPr dirty="0" err="1"/>
+              <a:t>bloqueadores</a:t>
+            </a:r>
+            <a:r>
+              <a:rPr dirty="0"/>
+              <a:t> </a:t>
+            </a:r>
+            <a:r>
+              <a:rPr dirty="0" err="1"/>
+              <a:t>precisam</a:t>
+            </a:r>
+            <a:r>
+              <a:rPr dirty="0"/>
+              <a:t> ser </a:t>
+            </a:r>
+            <a:r>
+              <a:rPr dirty="0" err="1"/>
+              <a:t>resolvidos</a:t>
+            </a:r>
+            <a:r>
+              <a:rPr dirty="0"/>
+              <a:t> </a:t>
+            </a:r>
+            <a:r>
+              <a:rPr dirty="0" err="1"/>
+              <a:t>simultaneamente</a:t>
+            </a:r>
+            <a:r>
+              <a:rPr dirty="0"/>
+              <a:t> para </a:t>
+            </a:r>
+            <a:r>
+              <a:rPr dirty="0" err="1"/>
+              <a:t>aprovação</a:t>
+            </a:r>
+            <a:r>
+              <a:rPr dirty="0"/>
+              <a:t> de </a:t>
+            </a:r>
+            <a:r>
+              <a:rPr dirty="0" err="1"/>
+              <a:t>síntese</a:t>
+            </a:r>
+            <a:endParaRPr dirty="0"/>
           </a:p>
         </p:txBody>
       </p:sp>
@@ -5290,6 +6632,7 @@
           <a:lstStyle/>
           <a:p>
             <a:pPr algn="ctr"/>
+            <a:endParaRPr/>
           </a:p>
         </p:txBody>
       </p:sp>
@@ -5302,7 +6645,7 @@
 </file>
 
 <file path=ppt/slides/slide2.xml><?xml version="1.0" encoding="utf-8"?>
-<p:sld xmlns:a="http://schemas.openxmlformats.org/drawingml/2006/main" xmlns:p="http://schemas.openxmlformats.org/presentationml/2006/main" xmlns:r="http://schemas.openxmlformats.org/officeDocument/2006/relationships">
+<p:sld xmlns:a="http://schemas.openxmlformats.org/drawingml/2006/main" xmlns:r="http://schemas.openxmlformats.org/officeDocument/2006/relationships" xmlns:p="http://schemas.openxmlformats.org/presentationml/2006/main">
   <p:cSld>
     <p:bg>
       <p:bgPr>
@@ -5318,7 +6661,14 @@
         <p:cNvGrpSpPr/>
         <p:nvPr/>
       </p:nvGrpSpPr>
-      <p:grpSpPr/>
+      <p:grpSpPr>
+        <a:xfrm>
+          <a:off x="0" y="0"/>
+          <a:ext cx="0" cy="0"/>
+          <a:chOff x="0" y="0"/>
+          <a:chExt cx="0" cy="0"/>
+        </a:xfrm>
+      </p:grpSpPr>
       <p:sp>
         <p:nvSpPr>
           <p:cNvPr id="2" name="TextBox 1"/>
@@ -5362,7 +6712,7 @@
         </p:nvSpPr>
         <p:spPr>
           <a:xfrm>
-            <a:off x="640080" y="1005840"/>
+            <a:off x="640080" y="1682496"/>
             <a:ext cx="5303520" cy="4572000"/>
           </a:xfrm>
           <a:prstGeom prst="rect">
@@ -5390,8 +6740,74 @@
               </a:defRPr>
             </a:pPr>
             <a:r>
-              <a:t>Lepidópteros-praga (*Spodoptera frugiperda*, *Anticarsia gemmatalis*) causam perdas significativas em culturas</a:t>
-            </a:r>
+              <a:rPr dirty="0" err="1"/>
+              <a:t>Lepidópteros-praga</a:t>
+            </a:r>
+            <a:r>
+              <a:rPr dirty="0"/>
+              <a:t> (*Spodoptera </a:t>
+            </a:r>
+            <a:r>
+              <a:rPr dirty="0" err="1"/>
+              <a:t>frugiperda</a:t>
+            </a:r>
+            <a:r>
+              <a:rPr dirty="0"/>
+              <a:t>*, *</a:t>
+            </a:r>
+            <a:r>
+              <a:rPr dirty="0" err="1"/>
+              <a:t>Anticarsia</a:t>
+            </a:r>
+            <a:r>
+              <a:rPr dirty="0"/>
+              <a:t> </a:t>
+            </a:r>
+            <a:r>
+              <a:rPr dirty="0" err="1"/>
+              <a:t>gemmatalis</a:t>
+            </a:r>
+            <a:r>
+              <a:rPr dirty="0"/>
+              <a:t>*) </a:t>
+            </a:r>
+            <a:r>
+              <a:rPr dirty="0" err="1"/>
+              <a:t>causam</a:t>
+            </a:r>
+            <a:r>
+              <a:rPr dirty="0"/>
+              <a:t> </a:t>
+            </a:r>
+            <a:r>
+              <a:rPr dirty="0" err="1"/>
+              <a:t>perdas</a:t>
+            </a:r>
+            <a:r>
+              <a:rPr dirty="0"/>
+              <a:t> </a:t>
+            </a:r>
+            <a:r>
+              <a:rPr dirty="0" err="1"/>
+              <a:t>significativas</a:t>
+            </a:r>
+            <a:r>
+              <a:rPr dirty="0"/>
+              <a:t> </a:t>
+            </a:r>
+            <a:r>
+              <a:rPr dirty="0" err="1"/>
+              <a:t>em</a:t>
+            </a:r>
+            <a:r>
+              <a:rPr dirty="0"/>
+              <a:t> </a:t>
+            </a:r>
+            <a:r>
+              <a:rPr dirty="0" err="1"/>
+              <a:t>culturas</a:t>
+            </a:r>
+            <a:endParaRPr dirty="0"/>
           </a:p>
           <a:p>
             <a:pPr>
@@ -5408,8 +6824,50 @@
               </a:defRPr>
             </a:pPr>
             <a:r>
-              <a:t>Resistência crescente a toxinas Bt e inseticidas químicos</a:t>
-            </a:r>
+              <a:rPr dirty="0" err="1"/>
+              <a:t>Resistência</a:t>
+            </a:r>
+            <a:r>
+              <a:rPr dirty="0"/>
+              <a:t> </a:t>
+            </a:r>
+            <a:r>
+              <a:rPr dirty="0" err="1"/>
+              <a:t>crescente</a:t>
+            </a:r>
+            <a:r>
+              <a:rPr dirty="0"/>
+              <a:t> a </a:t>
+            </a:r>
+            <a:r>
+              <a:rPr dirty="0" err="1"/>
+              <a:t>toxinas</a:t>
+            </a:r>
+            <a:r>
+              <a:rPr dirty="0"/>
+              <a:t> </a:t>
+            </a:r>
+            <a:r>
+              <a:rPr dirty="0" err="1"/>
+              <a:t>Bt</a:t>
+            </a:r>
+            <a:r>
+              <a:rPr dirty="0"/>
+              <a:t> e </a:t>
+            </a:r>
+            <a:r>
+              <a:rPr dirty="0" err="1"/>
+              <a:t>inseticidas</a:t>
+            </a:r>
+            <a:r>
+              <a:rPr dirty="0"/>
+              <a:t> </a:t>
+            </a:r>
+            <a:r>
+              <a:rPr dirty="0" err="1"/>
+              <a:t>químicos</a:t>
+            </a:r>
+            <a:endParaRPr dirty="0"/>
           </a:p>
           <a:p>
             <a:pPr>
@@ -5426,7 +6884,414 @@
               </a:defRPr>
             </a:pPr>
             <a:r>
-              <a:t>Necessidade de estratégias complementares de controle</a:t>
+              <a:rPr dirty="0" err="1"/>
+              <a:t>Necessidade</a:t>
+            </a:r>
+            <a:r>
+              <a:rPr dirty="0"/>
+              <a:t> de </a:t>
+            </a:r>
+            <a:r>
+              <a:rPr dirty="0" err="1"/>
+              <a:t>estratégias</a:t>
+            </a:r>
+            <a:r>
+              <a:rPr dirty="0"/>
+              <a:t> </a:t>
+            </a:r>
+            <a:r>
+              <a:rPr dirty="0" err="1"/>
+              <a:t>complementares</a:t>
+            </a:r>
+            <a:r>
+              <a:rPr dirty="0"/>
+              <a:t> de </a:t>
+            </a:r>
+            <a:r>
+              <a:rPr dirty="0" err="1"/>
+              <a:t>controle</a:t>
+            </a:r>
+            <a:endParaRPr dirty="0"/>
+          </a:p>
+        </p:txBody>
+      </p:sp>
+    </p:spTree>
+  </p:cSld>
+  <p:clrMapOvr>
+    <a:masterClrMapping/>
+  </p:clrMapOvr>
+</p:sld>
+</file>
+
+<file path=ppt/slides/slide20.xml><?xml version="1.0" encoding="utf-8"?>
+<p:sld xmlns:a="http://schemas.openxmlformats.org/drawingml/2006/main" xmlns:r="http://schemas.openxmlformats.org/officeDocument/2006/relationships" xmlns:p="http://schemas.openxmlformats.org/presentationml/2006/main">
+  <p:cSld>
+    <p:bg>
+      <p:bgPr>
+        <a:solidFill>
+          <a:srgbClr val="FFFFFF"/>
+        </a:solidFill>
+        <a:effectLst/>
+      </p:bgPr>
+    </p:bg>
+    <p:spTree>
+      <p:nvGrpSpPr>
+        <p:cNvPr id="1" name=""/>
+        <p:cNvGrpSpPr/>
+        <p:nvPr/>
+      </p:nvGrpSpPr>
+      <p:grpSpPr>
+        <a:xfrm>
+          <a:off x="0" y="0"/>
+          <a:ext cx="0" cy="0"/>
+          <a:chOff x="0" y="0"/>
+          <a:chExt cx="0" cy="0"/>
+        </a:xfrm>
+      </p:grpSpPr>
+      <p:sp>
+        <p:nvSpPr>
+          <p:cNvPr id="2" name="TextBox 1"/>
+          <p:cNvSpPr txBox="1"/>
+          <p:nvPr/>
+        </p:nvSpPr>
+        <p:spPr>
+          <a:xfrm>
+            <a:off x="457200" y="274320"/>
+            <a:ext cx="8229600" cy="548640"/>
+          </a:xfrm>
+          <a:prstGeom prst="rect">
+            <a:avLst/>
+          </a:prstGeom>
+          <a:noFill/>
+        </p:spPr>
+        <p:txBody>
+          <a:bodyPr wrap="square">
+            <a:spAutoFit/>
+          </a:bodyPr>
+          <a:lstStyle/>
+          <a:p>
+            <a:pPr>
+              <a:defRPr sz="4000" b="1">
+                <a:solidFill>
+                  <a:srgbClr val="003366"/>
+                </a:solidFill>
+              </a:defRPr>
+            </a:pPr>
+            <a:r>
+              <a:t>Achado-Chave — Por Que Reprodutibilidade Importa</a:t>
+            </a:r>
+          </a:p>
+        </p:txBody>
+      </p:sp>
+      <p:sp>
+        <p:nvSpPr>
+          <p:cNvPr id="3" name="TextBox 2"/>
+          <p:cNvSpPr txBox="1"/>
+          <p:nvPr/>
+        </p:nvSpPr>
+        <p:spPr>
+          <a:xfrm>
+            <a:off x="640080" y="1746504"/>
+            <a:ext cx="5303520" cy="4572000"/>
+          </a:xfrm>
+          <a:prstGeom prst="rect">
+            <a:avLst/>
+          </a:prstGeom>
+          <a:noFill/>
+        </p:spPr>
+        <p:txBody>
+          <a:bodyPr wrap="square">
+            <a:spAutoFit/>
+          </a:bodyPr>
+          <a:lstStyle/>
+          <a:p>
+            <a:pPr>
+              <a:spcBef>
+                <a:spcPts val="600"/>
+              </a:spcBef>
+              <a:spcAft>
+                <a:spcPts val="600"/>
+              </a:spcAft>
+              <a:defRPr sz="1800">
+                <a:solidFill>
+                  <a:srgbClr val="404040"/>
+                </a:solidFill>
+              </a:defRPr>
+            </a:pPr>
+            <a:r>
+              <a:rPr dirty="0"/>
+              <a:t>VRRPR </a:t>
+            </a:r>
+            <a:r>
+              <a:rPr dirty="0" err="1"/>
+              <a:t>demonstra</a:t>
+            </a:r>
+            <a:r>
+              <a:rPr dirty="0"/>
+              <a:t> </a:t>
+            </a:r>
+            <a:r>
+              <a:rPr dirty="0" err="1"/>
+              <a:t>que</a:t>
+            </a:r>
+            <a:r>
+              <a:rPr dirty="0"/>
+              <a:t> </a:t>
+            </a:r>
+            <a:r>
+              <a:rPr dirty="0" err="1"/>
+              <a:t>estabilidade</a:t>
+            </a:r>
+            <a:r>
+              <a:rPr dirty="0"/>
+              <a:t> global (RMSD </a:t>
+            </a:r>
+            <a:r>
+              <a:rPr dirty="0" err="1"/>
+              <a:t>baixo</a:t>
+            </a:r>
+            <a:r>
+              <a:rPr dirty="0"/>
+              <a:t>) </a:t>
+            </a:r>
+            <a:r>
+              <a:rPr dirty="0" err="1"/>
+              <a:t>pode</a:t>
+            </a:r>
+            <a:r>
+              <a:rPr dirty="0"/>
+              <a:t> </a:t>
+            </a:r>
+            <a:r>
+              <a:rPr dirty="0" err="1"/>
+              <a:t>mascarar</a:t>
+            </a:r>
+            <a:r>
+              <a:rPr dirty="0"/>
+              <a:t> </a:t>
+            </a:r>
+            <a:r>
+              <a:rPr dirty="0" err="1"/>
+              <a:t>falha</a:t>
+            </a:r>
+            <a:r>
+              <a:rPr dirty="0"/>
+              <a:t> </a:t>
+            </a:r>
+            <a:r>
+              <a:rPr dirty="0" err="1"/>
+              <a:t>funcional</a:t>
+            </a:r>
+            <a:r>
+              <a:rPr dirty="0"/>
+              <a:t> local</a:t>
+            </a:r>
+          </a:p>
+          <a:p>
+            <a:pPr>
+              <a:spcBef>
+                <a:spcPts val="600"/>
+              </a:spcBef>
+              <a:spcAft>
+                <a:spcPts val="600"/>
+              </a:spcAft>
+              <a:defRPr sz="1800">
+                <a:solidFill>
+                  <a:srgbClr val="404040"/>
+                </a:solidFill>
+              </a:defRPr>
+            </a:pPr>
+            <a:r>
+              <a:rPr dirty="0"/>
+              <a:t>Sem </a:t>
+            </a:r>
+            <a:r>
+              <a:rPr dirty="0" err="1"/>
+              <a:t>réplicas</a:t>
+            </a:r>
+            <a:r>
+              <a:rPr dirty="0"/>
+              <a:t> </a:t>
+            </a:r>
+            <a:r>
+              <a:rPr dirty="0" err="1"/>
+              <a:t>independentes</a:t>
+            </a:r>
+            <a:r>
+              <a:rPr dirty="0"/>
+              <a:t>, </a:t>
+            </a:r>
+            <a:r>
+              <a:rPr dirty="0" err="1"/>
+              <a:t>este</a:t>
+            </a:r>
+            <a:r>
+              <a:rPr dirty="0"/>
+              <a:t> </a:t>
+            </a:r>
+            <a:r>
+              <a:rPr dirty="0" err="1"/>
+              <a:t>candidato</a:t>
+            </a:r>
+            <a:r>
+              <a:rPr dirty="0"/>
+              <a:t> seria </a:t>
+            </a:r>
+            <a:r>
+              <a:rPr dirty="0" err="1"/>
+              <a:t>classificado</a:t>
+            </a:r>
+            <a:r>
+              <a:rPr dirty="0"/>
+              <a:t> </a:t>
+            </a:r>
+            <a:r>
+              <a:rPr dirty="0" err="1"/>
+              <a:t>como</a:t>
+            </a:r>
+            <a:r>
+              <a:rPr dirty="0"/>
+              <a:t> '</a:t>
+            </a:r>
+            <a:r>
+              <a:rPr dirty="0" err="1"/>
+              <a:t>estável</a:t>
+            </a:r>
+            <a:r>
+              <a:rPr dirty="0"/>
+              <a:t>' e </a:t>
+            </a:r>
+            <a:r>
+              <a:rPr dirty="0" err="1"/>
+              <a:t>potencialmente</a:t>
+            </a:r>
+            <a:r>
+              <a:rPr dirty="0"/>
+              <a:t> </a:t>
+            </a:r>
+            <a:r>
+              <a:rPr dirty="0" err="1"/>
+              <a:t>sintetizado</a:t>
+            </a:r>
+            <a:endParaRPr dirty="0"/>
+          </a:p>
+          <a:p>
+            <a:pPr>
+              <a:spcBef>
+                <a:spcPts val="600"/>
+              </a:spcBef>
+              <a:spcAft>
+                <a:spcPts val="600"/>
+              </a:spcAft>
+              <a:defRPr sz="1800">
+                <a:solidFill>
+                  <a:srgbClr val="404040"/>
+                </a:solidFill>
+              </a:defRPr>
+            </a:pPr>
+            <a:r>
+              <a:rPr dirty="0" err="1"/>
+              <a:t>Validação</a:t>
+            </a:r>
+            <a:r>
+              <a:rPr dirty="0"/>
+              <a:t> </a:t>
+            </a:r>
+            <a:r>
+              <a:rPr dirty="0" err="1"/>
+              <a:t>cruzada</a:t>
+            </a:r>
+            <a:r>
+              <a:rPr dirty="0"/>
+              <a:t> (n=3) </a:t>
+            </a:r>
+            <a:r>
+              <a:rPr dirty="0" err="1"/>
+              <a:t>revelou</a:t>
+            </a:r>
+            <a:r>
+              <a:rPr dirty="0"/>
+              <a:t> </a:t>
+            </a:r>
+            <a:r>
+              <a:rPr dirty="0" err="1"/>
+              <a:t>ocupância</a:t>
+            </a:r>
+            <a:r>
+              <a:rPr dirty="0"/>
+              <a:t> P1 </a:t>
+            </a:r>
+            <a:r>
+              <a:rPr dirty="0" err="1"/>
+              <a:t>colapsando</a:t>
+            </a:r>
+            <a:r>
+              <a:rPr dirty="0"/>
+              <a:t> de 67,6% para 0,15% entre </a:t>
+            </a:r>
+            <a:r>
+              <a:rPr dirty="0" err="1"/>
+              <a:t>réplicas</a:t>
+            </a:r>
+            <a:endParaRPr dirty="0"/>
+          </a:p>
+          <a:p>
+            <a:pPr>
+              <a:spcBef>
+                <a:spcPts val="600"/>
+              </a:spcBef>
+              <a:spcAft>
+                <a:spcPts val="600"/>
+              </a:spcAft>
+              <a:defRPr sz="1800">
+                <a:solidFill>
+                  <a:srgbClr val="404040"/>
+                </a:solidFill>
+              </a:defRPr>
+            </a:pPr>
+            <a:r>
+              <a:rPr dirty="0"/>
+              <a:t>**</a:t>
+            </a:r>
+            <a:r>
+              <a:rPr dirty="0" err="1"/>
+              <a:t>Lição</a:t>
+            </a:r>
+            <a:r>
+              <a:rPr dirty="0"/>
+              <a:t> </a:t>
+            </a:r>
+            <a:r>
+              <a:rPr dirty="0" err="1"/>
+              <a:t>metodológica</a:t>
+            </a:r>
+            <a:r>
+              <a:rPr dirty="0"/>
+              <a:t>**: </a:t>
+            </a:r>
+            <a:r>
+              <a:rPr dirty="0" err="1"/>
+              <a:t>réplicas</a:t>
+            </a:r>
+            <a:r>
+              <a:rPr dirty="0"/>
+              <a:t> in silico = </a:t>
+            </a:r>
+            <a:r>
+              <a:rPr dirty="0" err="1"/>
+              <a:t>essencial</a:t>
+            </a:r>
+            <a:r>
+              <a:rPr dirty="0"/>
+              <a:t> antes de </a:t>
+            </a:r>
+            <a:r>
+              <a:rPr dirty="0" err="1"/>
+              <a:t>síntese</a:t>
+            </a:r>
+            <a:r>
+              <a:rPr dirty="0"/>
+              <a:t> experimental</a:t>
             </a:r>
           </a:p>
         </p:txBody>
@@ -5473,6 +7338,7 @@
           <a:lstStyle/>
           <a:p>
             <a:pPr algn="ctr"/>
+            <a:endParaRPr/>
           </a:p>
         </p:txBody>
       </p:sp>
@@ -5484,8 +7350,8 @@
 </p:sld>
 </file>
 
-<file path=ppt/slides/slide20.xml><?xml version="1.0" encoding="utf-8"?>
-<p:sld xmlns:a="http://schemas.openxmlformats.org/drawingml/2006/main" xmlns:p="http://schemas.openxmlformats.org/presentationml/2006/main" xmlns:r="http://schemas.openxmlformats.org/officeDocument/2006/relationships">
+<file path=ppt/slides/slide21.xml><?xml version="1.0" encoding="utf-8"?>
+<p:sld xmlns:a="http://schemas.openxmlformats.org/drawingml/2006/main" xmlns:r="http://schemas.openxmlformats.org/officeDocument/2006/relationships" xmlns:p="http://schemas.openxmlformats.org/presentationml/2006/main">
   <p:cSld>
     <p:bg>
       <p:bgPr>
@@ -5501,7 +7367,14 @@
         <p:cNvGrpSpPr/>
         <p:nvPr/>
       </p:nvGrpSpPr>
-      <p:grpSpPr/>
+      <p:grpSpPr>
+        <a:xfrm>
+          <a:off x="0" y="0"/>
+          <a:ext cx="0" cy="0"/>
+          <a:chOff x="0" y="0"/>
+          <a:chExt cx="0" cy="0"/>
+        </a:xfrm>
+      </p:grpSpPr>
       <p:sp>
         <p:nvSpPr>
           <p:cNvPr id="2" name="TextBox 1"/>
@@ -5532,7 +7405,7 @@
               </a:defRPr>
             </a:pPr>
             <a:r>
-              <a:t>Achado-Chave — Por Que Reprodutibilidade Importa</a:t>
+              <a:t>Conclusões — Metodologia Rigorosa</a:t>
             </a:r>
           </a:p>
         </p:txBody>
@@ -5545,7 +7418,7 @@
         </p:nvSpPr>
         <p:spPr>
           <a:xfrm>
-            <a:off x="640080" y="1005840"/>
+            <a:off x="640080" y="1261872"/>
             <a:ext cx="5303520" cy="4572000"/>
           </a:xfrm>
           <a:prstGeom prst="rect">
@@ -5573,8 +7446,54 @@
               </a:defRPr>
             </a:pPr>
             <a:r>
-              <a:t>VRRPR demonstra que estabilidade global (RMSD baixo) pode mascarar falha funcional local</a:t>
-            </a:r>
+              <a:rPr dirty="0"/>
+              <a:t>Pipeline </a:t>
+            </a:r>
+            <a:r>
+              <a:rPr dirty="0" err="1"/>
+              <a:t>multiagente</a:t>
+            </a:r>
+            <a:r>
+              <a:rPr dirty="0"/>
+              <a:t> </a:t>
+            </a:r>
+            <a:r>
+              <a:rPr dirty="0" err="1"/>
+              <a:t>integrou</a:t>
+            </a:r>
+            <a:r>
+              <a:rPr dirty="0"/>
+              <a:t> IA </a:t>
+            </a:r>
+            <a:r>
+              <a:rPr dirty="0" err="1"/>
+              <a:t>generativa</a:t>
+            </a:r>
+            <a:r>
+              <a:rPr dirty="0"/>
+              <a:t>, </a:t>
+            </a:r>
+            <a:r>
+              <a:rPr dirty="0" err="1"/>
+              <a:t>dinâmica</a:t>
+            </a:r>
+            <a:r>
+              <a:rPr dirty="0"/>
+              <a:t> molecular e </a:t>
+            </a:r>
+            <a:r>
+              <a:rPr dirty="0" err="1"/>
+              <a:t>validação</a:t>
+            </a:r>
+            <a:r>
+              <a:rPr dirty="0"/>
+              <a:t> </a:t>
+            </a:r>
+            <a:r>
+              <a:rPr dirty="0" err="1"/>
+              <a:t>cruzada</a:t>
+            </a:r>
+            <a:endParaRPr dirty="0"/>
           </a:p>
           <a:p>
             <a:pPr>
@@ -5591,7 +7510,32 @@
               </a:defRPr>
             </a:pPr>
             <a:r>
-              <a:t>Sem réplicas independentes, este candidato seria classificado como 'estável' e potencialmente sintetizado</a:t>
+              <a:rPr dirty="0"/>
+              <a:t>**330 backbones + 120k+ </a:t>
+            </a:r>
+            <a:r>
+              <a:rPr dirty="0" err="1"/>
+              <a:t>sequências</a:t>
+            </a:r>
+            <a:r>
+              <a:rPr dirty="0"/>
+              <a:t>** </a:t>
+            </a:r>
+            <a:r>
+              <a:rPr dirty="0" err="1"/>
+              <a:t>reduzidas</a:t>
+            </a:r>
+            <a:r>
+              <a:rPr dirty="0"/>
+              <a:t> a TOP-13 pela </a:t>
+            </a:r>
+            <a:r>
+              <a:rPr dirty="0" err="1"/>
+              <a:t>reprodutibilidade</a:t>
+            </a:r>
+            <a:r>
+              <a:rPr dirty="0"/>
+              <a:t> real</a:t>
             </a:r>
           </a:p>
           <a:p>
@@ -5609,7 +7553,60 @@
               </a:defRPr>
             </a:pPr>
             <a:r>
-              <a:t>Validação cruzada (n=3) revelou ocupância P1 colapsando de 67,6% para 0,15% entre réplicas</a:t>
+              <a:rPr dirty="0" err="1"/>
+              <a:t>Tríade</a:t>
+            </a:r>
+            <a:r>
+              <a:rPr dirty="0"/>
+              <a:t> </a:t>
+            </a:r>
+            <a:r>
+              <a:rPr dirty="0" err="1"/>
+              <a:t>catalítica</a:t>
+            </a:r>
+            <a:r>
+              <a:rPr dirty="0"/>
+              <a:t> </a:t>
+            </a:r>
+            <a:r>
+              <a:rPr dirty="0" err="1"/>
+              <a:t>verificada</a:t>
+            </a:r>
+            <a:r>
+              <a:rPr dirty="0"/>
+              <a:t> </a:t>
+            </a:r>
+            <a:r>
+              <a:rPr dirty="0" err="1"/>
+              <a:t>independentemente</a:t>
+            </a:r>
+            <a:r>
+              <a:rPr dirty="0"/>
+              <a:t> (bug real </a:t>
+            </a:r>
+            <a:r>
+              <a:rPr dirty="0" err="1"/>
+              <a:t>detectado</a:t>
+            </a:r>
+            <a:r>
+              <a:rPr dirty="0"/>
+              <a:t> + </a:t>
+            </a:r>
+            <a:r>
+              <a:rPr dirty="0" err="1"/>
+              <a:t>corrigido</a:t>
+            </a:r>
+            <a:r>
+              <a:rPr dirty="0"/>
+              <a:t> </a:t>
+            </a:r>
+            <a:r>
+              <a:rPr dirty="0" err="1"/>
+              <a:t>em</a:t>
+            </a:r>
+            <a:r>
+              <a:rPr dirty="0"/>
+              <a:t> H. virescens)</a:t>
             </a:r>
           </a:p>
           <a:p>
@@ -5627,7 +7624,119 @@
               </a:defRPr>
             </a:pPr>
             <a:r>
-              <a:t>**Lição metodológica**: réplicas in silico = essencial antes de síntese experimental</a:t>
+              <a:rPr dirty="0"/>
+              <a:t>Cada </a:t>
+            </a:r>
+            <a:r>
+              <a:rPr dirty="0" err="1"/>
+              <a:t>etapa</a:t>
+            </a:r>
+            <a:r>
+              <a:rPr dirty="0"/>
+              <a:t> </a:t>
+            </a:r>
+            <a:r>
+              <a:rPr dirty="0" err="1"/>
+              <a:t>computacional</a:t>
+            </a:r>
+            <a:r>
+              <a:rPr dirty="0"/>
+              <a:t> </a:t>
+            </a:r>
+            <a:r>
+              <a:rPr dirty="0" err="1"/>
+              <a:t>submetida</a:t>
+            </a:r>
+            <a:r>
+              <a:rPr dirty="0"/>
+              <a:t> a </a:t>
+            </a:r>
+            <a:r>
+              <a:rPr dirty="0" err="1"/>
+              <a:t>validação</a:t>
+            </a:r>
+            <a:r>
+              <a:rPr dirty="0"/>
+              <a:t> </a:t>
+            </a:r>
+            <a:r>
+              <a:rPr dirty="0" err="1"/>
+              <a:t>cruzada</a:t>
+            </a:r>
+            <a:r>
+              <a:rPr dirty="0"/>
+              <a:t> (</a:t>
+            </a:r>
+            <a:r>
+              <a:rPr dirty="0" err="1"/>
+              <a:t>não</a:t>
+            </a:r>
+            <a:r>
+              <a:rPr dirty="0"/>
+              <a:t> </a:t>
+            </a:r>
+            <a:r>
+              <a:rPr dirty="0" err="1"/>
+              <a:t>opcional</a:t>
+            </a:r>
+            <a:r>
+              <a:rPr dirty="0"/>
+              <a:t>)</a:t>
+            </a:r>
+          </a:p>
+          <a:p>
+            <a:pPr>
+              <a:spcBef>
+                <a:spcPts val="600"/>
+              </a:spcBef>
+              <a:spcAft>
+                <a:spcPts val="600"/>
+              </a:spcAft>
+              <a:defRPr sz="1800">
+                <a:solidFill>
+                  <a:srgbClr val="404040"/>
+                </a:solidFill>
+              </a:defRPr>
+            </a:pPr>
+            <a:r>
+              <a:rPr dirty="0" err="1"/>
+              <a:t>Candidatos</a:t>
+            </a:r>
+            <a:r>
+              <a:rPr dirty="0"/>
+              <a:t> </a:t>
+            </a:r>
+            <a:r>
+              <a:rPr dirty="0" err="1"/>
+              <a:t>reprodutivelmente</a:t>
+            </a:r>
+            <a:r>
+              <a:rPr dirty="0"/>
+              <a:t> </a:t>
+            </a:r>
+            <a:r>
+              <a:rPr dirty="0" err="1"/>
+              <a:t>estáveis</a:t>
+            </a:r>
+            <a:r>
+              <a:rPr dirty="0"/>
+              <a:t>: SRTRR, VRYRR, VRRPR, HRPRRPR (base </a:t>
+            </a:r>
+            <a:r>
+              <a:rPr dirty="0" err="1"/>
+              <a:t>sólida</a:t>
+            </a:r>
+            <a:r>
+              <a:rPr dirty="0"/>
+              <a:t> para </a:t>
+            </a:r>
+            <a:r>
+              <a:rPr dirty="0" err="1"/>
+              <a:t>síntese</a:t>
+            </a:r>
+            <a:r>
+              <a:rPr dirty="0"/>
+              <a:t>)</a:t>
             </a:r>
           </a:p>
         </p:txBody>
@@ -5674,6 +7783,7 @@
           <a:lstStyle/>
           <a:p>
             <a:pPr algn="ctr"/>
+            <a:endParaRPr/>
           </a:p>
         </p:txBody>
       </p:sp>
@@ -5685,8 +7795,8 @@
 </p:sld>
 </file>
 
-<file path=ppt/slides/slide21.xml><?xml version="1.0" encoding="utf-8"?>
-<p:sld xmlns:a="http://schemas.openxmlformats.org/drawingml/2006/main" xmlns:p="http://schemas.openxmlformats.org/presentationml/2006/main" xmlns:r="http://schemas.openxmlformats.org/officeDocument/2006/relationships">
+<file path=ppt/slides/slide22.xml><?xml version="1.0" encoding="utf-8"?>
+<p:sld xmlns:a="http://schemas.openxmlformats.org/drawingml/2006/main" xmlns:r="http://schemas.openxmlformats.org/officeDocument/2006/relationships" xmlns:p="http://schemas.openxmlformats.org/presentationml/2006/main">
   <p:cSld>
     <p:bg>
       <p:bgPr>
@@ -5702,7 +7812,14 @@
         <p:cNvGrpSpPr/>
         <p:nvPr/>
       </p:nvGrpSpPr>
-      <p:grpSpPr/>
+      <p:grpSpPr>
+        <a:xfrm>
+          <a:off x="0" y="0"/>
+          <a:ext cx="0" cy="0"/>
+          <a:chOff x="0" y="0"/>
+          <a:chExt cx="0" cy="0"/>
+        </a:xfrm>
+      </p:grpSpPr>
       <p:sp>
         <p:nvSpPr>
           <p:cNvPr id="2" name="TextBox 1"/>
@@ -5733,7 +7850,7 @@
               </a:defRPr>
             </a:pPr>
             <a:r>
-              <a:t>Conclusões — Metodologia Rigorosa</a:t>
+              <a:t>Próximos Passos</a:t>
             </a:r>
           </a:p>
         </p:txBody>
@@ -5746,7 +7863,7 @@
         </p:nvSpPr>
         <p:spPr>
           <a:xfrm>
-            <a:off x="640080" y="1005840"/>
+            <a:off x="640080" y="1280160"/>
             <a:ext cx="5303520" cy="4572000"/>
           </a:xfrm>
           <a:prstGeom prst="rect">
@@ -5774,8 +7891,54 @@
               </a:defRPr>
             </a:pPr>
             <a:r>
-              <a:t>Pipeline multiagente integrou IA generativa, dinâmica molecular e validação cruzada</a:t>
-            </a:r>
+              <a:rPr dirty="0"/>
+              <a:t>**Curto </a:t>
+            </a:r>
+            <a:r>
+              <a:rPr dirty="0" err="1"/>
+              <a:t>prazo</a:t>
+            </a:r>
+            <a:r>
+              <a:rPr dirty="0"/>
+              <a:t>**: </a:t>
+            </a:r>
+            <a:r>
+              <a:rPr dirty="0" err="1"/>
+              <a:t>resolução</a:t>
+            </a:r>
+            <a:r>
+              <a:rPr dirty="0"/>
+              <a:t> </a:t>
+            </a:r>
+            <a:r>
+              <a:rPr dirty="0" err="1"/>
+              <a:t>simultânea</a:t>
+            </a:r>
+            <a:r>
+              <a:rPr dirty="0"/>
+              <a:t> de </a:t>
+            </a:r>
+            <a:r>
+              <a:rPr dirty="0" err="1"/>
+              <a:t>especificidade</a:t>
+            </a:r>
+            <a:r>
+              <a:rPr dirty="0"/>
+              <a:t> (SI ≥ 2,0) e </a:t>
+            </a:r>
+            <a:r>
+              <a:rPr dirty="0" err="1"/>
+              <a:t>resistência</a:t>
+            </a:r>
+            <a:r>
+              <a:rPr dirty="0"/>
+              <a:t> </a:t>
+            </a:r>
+            <a:r>
+              <a:rPr dirty="0" err="1"/>
+              <a:t>proteolítica</a:t>
+            </a:r>
+            <a:endParaRPr dirty="0"/>
           </a:p>
           <a:p>
             <a:pPr>
@@ -5792,7 +7955,64 @@
               </a:defRPr>
             </a:pPr>
             <a:r>
-              <a:t>**330 backbones + 120k+ sequências** reduzidas a TOP-13 pela reprodutibilidade real</a:t>
+              <a:rPr dirty="0"/>
+              <a:t>**</a:t>
+            </a:r>
+            <a:r>
+              <a:rPr dirty="0" err="1"/>
+              <a:t>Médio</a:t>
+            </a:r>
+            <a:r>
+              <a:rPr dirty="0"/>
+              <a:t> </a:t>
+            </a:r>
+            <a:r>
+              <a:rPr dirty="0" err="1"/>
+              <a:t>prazo</a:t>
+            </a:r>
+            <a:r>
+              <a:rPr dirty="0"/>
+              <a:t>**: </a:t>
+            </a:r>
+            <a:r>
+              <a:rPr dirty="0" err="1"/>
+              <a:t>síntese</a:t>
+            </a:r>
+            <a:r>
+              <a:rPr dirty="0"/>
+              <a:t> </a:t>
+            </a:r>
+            <a:r>
+              <a:rPr dirty="0" err="1"/>
+              <a:t>química</a:t>
+            </a:r>
+            <a:r>
+              <a:rPr dirty="0"/>
+              <a:t> e </a:t>
+            </a:r>
+            <a:r>
+              <a:rPr dirty="0" err="1"/>
+              <a:t>validação</a:t>
+            </a:r>
+            <a:r>
+              <a:rPr dirty="0"/>
+              <a:t> experimental (</a:t>
+            </a:r>
+            <a:r>
+              <a:rPr dirty="0" err="1"/>
+              <a:t>bioensaios</a:t>
+            </a:r>
+            <a:r>
+              <a:rPr dirty="0"/>
+              <a:t> contra </a:t>
+            </a:r>
+            <a:r>
+              <a:rPr dirty="0" err="1"/>
+              <a:t>tripsinas</a:t>
+            </a:r>
+            <a:r>
+              <a:rPr dirty="0"/>
+              <a:t> reais)</a:t>
             </a:r>
           </a:p>
           <a:p>
@@ -5810,44 +8030,54 @@
               </a:defRPr>
             </a:pPr>
             <a:r>
-              <a:t>Tríade catalítica verificada independentemente (bug real detectado + corrigido em H. virescens)</a:t>
-            </a:r>
-          </a:p>
-          <a:p>
-            <a:pPr>
-              <a:spcBef>
-                <a:spcPts val="600"/>
-              </a:spcBef>
-              <a:spcAft>
-                <a:spcPts val="600"/>
-              </a:spcAft>
-              <a:defRPr sz="1800">
-                <a:solidFill>
-                  <a:srgbClr val="404040"/>
-                </a:solidFill>
-              </a:defRPr>
-            </a:pPr>
-            <a:r>
-              <a:t>Cada etapa computacional submetida a validação cruzada (não opcional)</a:t>
-            </a:r>
-          </a:p>
-          <a:p>
-            <a:pPr>
-              <a:spcBef>
-                <a:spcPts val="600"/>
-              </a:spcBef>
-              <a:spcAft>
-                <a:spcPts val="600"/>
-              </a:spcAft>
-              <a:defRPr sz="1800">
-                <a:solidFill>
-                  <a:srgbClr val="404040"/>
-                </a:solidFill>
-              </a:defRPr>
-            </a:pPr>
-            <a:r>
-              <a:t>Candidatos reprodutivelmente estáveis: SRTRR, VRYRR, VRRPR, HRPRRPR (base sólida para síntese)</a:t>
-            </a:r>
+              <a:rPr dirty="0"/>
+              <a:t>**Longo </a:t>
+            </a:r>
+            <a:r>
+              <a:rPr dirty="0" err="1"/>
+              <a:t>prazo</a:t>
+            </a:r>
+            <a:r>
+              <a:rPr dirty="0"/>
+              <a:t>**: </a:t>
+            </a:r>
+            <a:r>
+              <a:rPr dirty="0" err="1"/>
+              <a:t>otimização</a:t>
+            </a:r>
+            <a:r>
+              <a:rPr dirty="0"/>
+              <a:t> contra </a:t>
+            </a:r>
+            <a:r>
+              <a:rPr dirty="0" err="1"/>
+              <a:t>múltiplas</a:t>
+            </a:r>
+            <a:r>
+              <a:rPr dirty="0"/>
+              <a:t> </a:t>
+            </a:r>
+            <a:r>
+              <a:rPr dirty="0" err="1"/>
+              <a:t>espécies-praga</a:t>
+            </a:r>
+            <a:r>
+              <a:rPr dirty="0"/>
+              <a:t> + </a:t>
+            </a:r>
+            <a:r>
+              <a:rPr dirty="0" err="1"/>
+              <a:t>formação</a:t>
+            </a:r>
+            <a:r>
+              <a:rPr dirty="0"/>
+              <a:t> de </a:t>
+            </a:r>
+            <a:r>
+              <a:rPr dirty="0" err="1"/>
+              <a:t>adjuvantes</a:t>
+            </a:r>
+            <a:endParaRPr dirty="0"/>
           </a:p>
         </p:txBody>
       </p:sp>
@@ -5893,6 +8123,7 @@
           <a:lstStyle/>
           <a:p>
             <a:pPr algn="ctr"/>
+            <a:endParaRPr/>
           </a:p>
         </p:txBody>
       </p:sp>
@@ -5904,7 +8135,7 @@
 </p:sld>
 </file>
 
-<file path=ppt/slides/slide22.xml><?xml version="1.0" encoding="utf-8"?>
+<file path=ppt/slides/slide23.xml><?xml version="1.0" encoding="utf-8"?>
 <p:sld xmlns:a="http://schemas.openxmlformats.org/drawingml/2006/main" xmlns:p="http://schemas.openxmlformats.org/presentationml/2006/main" xmlns:r="http://schemas.openxmlformats.org/officeDocument/2006/relationships">
   <p:cSld>
     <p:bg>
@@ -5952,7 +8183,7 @@
               </a:defRPr>
             </a:pPr>
             <a:r>
-              <a:t>Próximos Passos</a:t>
+              <a:t>Calibração da Escada de Scoring (B0.5) — Fechada</a:t>
             </a:r>
           </a:p>
         </p:txBody>
@@ -5993,7 +8224,7 @@
               </a:defRPr>
             </a:pPr>
             <a:r>
-              <a:t>**Curto prazo**: resolução simultânea de especificidade (SI ≥ 2,0) e resistência proteolítica</a:t>
+              <a:t>6 inibidores reais (BPTI, SFTI-1, SKTI, Bowman-Birk, EcTI, ApTI) + 10 decoys, 2 receptores (tripsina bovina real + S. frugiperda)</a:t>
             </a:r>
           </a:p>
           <a:p>
@@ -6011,7 +8242,7 @@
               </a:defRPr>
             </a:pPr>
             <a:r>
-              <a:t>**Médio prazo**: síntese química e validação experimental (bioensaios contra tripsinas reais)</a:t>
+              <a:t>Boltz-2 (confidence/pLDDT): separa real de decoy em 10/10 pares — único método validado</a:t>
             </a:r>
           </a:p>
           <a:p>
@@ -6029,7 +8260,43 @@
               </a:defRPr>
             </a:pPr>
             <a:r>
-              <a:t>**Longo prazo**: otimização contra múltiplas espécies-praga + formação de adjuvantes</a:t>
+              <a:t>RMSD de MD curta (2ns, complexo inteiro): 5/10 — equivalente a acaso</a:t>
+            </a:r>
+          </a:p>
+          <a:p>
+            <a:pPr>
+              <a:spcBef>
+                <a:spcPts val="600"/>
+              </a:spcBef>
+              <a:spcAft>
+                <a:spcPts val="600"/>
+              </a:spcAft>
+              <a:defRPr sz="1800">
+                <a:solidFill>
+                  <a:srgbClr val="404040"/>
+                </a:solidFill>
+              </a:defRPr>
+            </a:pPr>
+            <a:r>
+              <a:t>MM-PBSA (GB, trajetória única): 4/10 — PIOR que acaso (decoy vence por até +144,8 kcal/mol)</a:t>
+            </a:r>
+          </a:p>
+          <a:p>
+            <a:pPr>
+              <a:spcBef>
+                <a:spcPts val="600"/>
+              </a:spcBef>
+              <a:spcAft>
+                <a:spcPts val="600"/>
+              </a:spcAft>
+              <a:defRPr sz="1800">
+                <a:solidFill>
+                  <a:srgbClr val="404040"/>
+                </a:solidFill>
+              </a:defRPr>
+            </a:pPr>
+            <a:r>
+              <a:t>Decisão do usuário: loop de contrasseleção (B2.7) usa apenas Boltz-2 como scorer</a:t>
             </a:r>
           </a:p>
         </p:txBody>
@@ -6087,7 +8354,7 @@
 </p:sld>
 </file>
 
-<file path=ppt/slides/slide3.xml><?xml version="1.0" encoding="utf-8"?>
+<file path=ppt/slides/slide24.xml><?xml version="1.0" encoding="utf-8"?>
 <p:sld xmlns:a="http://schemas.openxmlformats.org/drawingml/2006/main" xmlns:p="http://schemas.openxmlformats.org/presentationml/2006/main" xmlns:r="http://schemas.openxmlformats.org/officeDocument/2006/relationships">
   <p:cSld>
     <p:bg>
@@ -6135,7 +8402,7 @@
               </a:defRPr>
             </a:pPr>
             <a:r>
-              <a:t>Estratégia Alternativa — Inibidores de Proteases Digestivas</a:t>
+              <a:t>B1.4 — Mapeamento Real dos Subsítios S1-S4/S1'-S3'</a:t>
             </a:r>
           </a:p>
         </p:txBody>
@@ -6176,7 +8443,7 @@
               </a:defRPr>
             </a:pPr>
             <a:r>
-              <a:t>Tripsinas: enzimas centrais na digestão de proteínas em larvas de Lepidoptera</a:t>
+              <a:t>Substitui heurística quebrada (offset sistemático +15/16 resíduos em 8/9 espécies)</a:t>
             </a:r>
           </a:p>
           <a:p>
@@ -6194,7 +8461,7 @@
               </a:defRPr>
             </a:pPr>
             <a:r>
-              <a:t>Inibidores de proteases = bloqueio direto da fisiologia digestiva</a:t>
+              <a:t>P1 de BPTI/SFTI-1 achado por geometria real em complexos cristalográficos reais (2PTC, 1SFI)</a:t>
             </a:r>
           </a:p>
           <a:p>
@@ -6212,7 +8479,7 @@
               </a:defRPr>
             </a:pPr>
             <a:r>
-              <a:t>Precedente natural: inibidores Kunitz/BPTI (comprovados em literatura)</a:t>
+              <a:t>Transferência para os 9 receptores via foldseek TMalign — equivalência estrutural real</a:t>
             </a:r>
           </a:p>
           <a:p>
@@ -6230,7 +8497,25 @@
               </a:defRPr>
             </a:pPr>
             <a:r>
-              <a:t>Atividade real documentada: inibição tight-binding + sinergia com Bt</a:t>
+              <a:t>Resultado: 18/18 espécie×template aprovados (TMscore ~0,95, RMSD ~1,3Å)</a:t>
+            </a:r>
+          </a:p>
+          <a:p>
+            <a:pPr>
+              <a:spcBef>
+                <a:spcPts val="600"/>
+              </a:spcBef>
+              <a:spcAft>
+                <a:spcPts val="600"/>
+              </a:spcAft>
+              <a:defRPr sz="1800">
+                <a:solidFill>
+                  <a:srgbClr val="404040"/>
+                </a:solidFill>
+              </a:defRPr>
+            </a:pPr>
+            <a:r>
+              <a:t>Validação cruzada: 100% de concordância com método independente anterior (offset de sequência)</a:t>
             </a:r>
           </a:p>
         </p:txBody>
@@ -6288,7 +8573,7 @@
 </p:sld>
 </file>
 
-<file path=ppt/slides/slide4.xml><?xml version="1.0" encoding="utf-8"?>
+<file path=ppt/slides/slide25.xml><?xml version="1.0" encoding="utf-8"?>
 <p:sld xmlns:a="http://schemas.openxmlformats.org/drawingml/2006/main" xmlns:p="http://schemas.openxmlformats.org/presentationml/2006/main" xmlns:r="http://schemas.openxmlformats.org/officeDocument/2006/relationships">
   <p:cSld>
     <p:bg>
@@ -6336,7 +8621,7 @@
               </a:defRPr>
             </a:pPr>
             <a:r>
-              <a:t>Lacuna do Projeto — Design Computacional de Novos Peptídeos</a:t>
+              <a:t>Pivô: Geração por Difusão contra Lepidoptera (em andamento)</a:t>
             </a:r>
           </a:p>
         </p:txBody>
@@ -6377,7 +8662,7 @@
               </a:defRPr>
             </a:pPr>
             <a:r>
-              <a:t>Inibidores naturais enfrentam limitações: suscetibilidade a clivagem proteolítica</a:t>
+              <a:t>Pausa temporária da linha de contrasseleção (painel negativo/seletividade) — foco em potência ampla contra o painel de 7 pragas-alvo</a:t>
             </a:r>
           </a:p>
           <a:p>
@@ -6395,7 +8680,7 @@
               </a:defRPr>
             </a:pPr>
             <a:r>
-              <a:t>IA generativa para design de proteínas abre alternativa: gerar peptídeos inéditos computacionalmente</a:t>
+              <a:t>Trilha A: macrociclo via RFdiffusion cíclico, ancorado nos hotspots reais de B1.4</a:t>
             </a:r>
           </a:p>
           <a:p>
@@ -6413,7 +8698,7 @@
               </a:defRPr>
             </a:pPr>
             <a:r>
-              <a:t>Validação rigorosa in silico em cada etapa (não apenas escore estático)</a:t>
+              <a:t>Piloto técnico validado ponta-a-ponta (fechamento N-C real ~1,3Å, ProteinMPNN funcionando)</a:t>
             </a:r>
           </a:p>
           <a:p>
@@ -6431,7 +8716,25 @@
               </a:defRPr>
             </a:pPr>
             <a:r>
-              <a:t>Objetivo: candidatos reprodutivelmente estáveis + específicos + resistentes</a:t>
+              <a:t>Campanha real em andamento: 7 espécies × 5 comprimentos (8-16aa) × 10 designs = 350 backbones</a:t>
+            </a:r>
+          </a:p>
+          <a:p>
+            <a:pPr>
+              <a:spcBef>
+                <a:spcPts val="600"/>
+              </a:spcBef>
+              <a:spcAft>
+                <a:spcPts val="600"/>
+              </a:spcAft>
+              <a:defRPr sz="1800">
+                <a:solidFill>
+                  <a:srgbClr val="404040"/>
+                </a:solidFill>
+              </a:defRPr>
+            </a:pPr>
+            <a:r>
+              <a:t>Próximo passo: triagem dos candidatos gerados via Boltz-2 (único scorer validado)</a:t>
             </a:r>
           </a:p>
         </p:txBody>
@@ -6489,8 +8792,8 @@
 </p:sld>
 </file>
 
-<file path=ppt/slides/slide5.xml><?xml version="1.0" encoding="utf-8"?>
-<p:sld xmlns:a="http://schemas.openxmlformats.org/drawingml/2006/main" xmlns:p="http://schemas.openxmlformats.org/presentationml/2006/main" xmlns:r="http://schemas.openxmlformats.org/officeDocument/2006/relationships">
+<file path=ppt/slides/slide3.xml><?xml version="1.0" encoding="utf-8"?>
+<p:sld xmlns:a="http://schemas.openxmlformats.org/drawingml/2006/main" xmlns:r="http://schemas.openxmlformats.org/officeDocument/2006/relationships" xmlns:p="http://schemas.openxmlformats.org/presentationml/2006/main">
   <p:cSld>
     <p:bg>
       <p:bgPr>
@@ -6506,7 +8809,14 @@
         <p:cNvGrpSpPr/>
         <p:nvPr/>
       </p:nvGrpSpPr>
-      <p:grpSpPr/>
+      <p:grpSpPr>
+        <a:xfrm>
+          <a:off x="0" y="0"/>
+          <a:ext cx="0" cy="0"/>
+          <a:chOff x="0" y="0"/>
+          <a:chExt cx="0" cy="0"/>
+        </a:xfrm>
+      </p:grpSpPr>
       <p:sp>
         <p:nvSpPr>
           <p:cNvPr id="2" name="TextBox 1"/>
@@ -6537,7 +8847,7 @@
               </a:defRPr>
             </a:pPr>
             <a:r>
-              <a:t>Pipeline Multiagente — Arquitetura</a:t>
+              <a:t>Estratégia Alternativa — Inibidores de Proteases Digestivas</a:t>
             </a:r>
           </a:p>
         </p:txBody>
@@ -6550,7 +8860,7 @@
         </p:nvSpPr>
         <p:spPr>
           <a:xfrm>
-            <a:off x="640080" y="1005840"/>
+            <a:off x="557784" y="1554480"/>
             <a:ext cx="5303520" cy="4572000"/>
           </a:xfrm>
           <a:prstGeom prst="rect">
@@ -6578,7 +8888,68 @@
               </a:defRPr>
             </a:pPr>
             <a:r>
-              <a:t>10 agentes especializados orquestrando fluxo end-to-end</a:t>
+              <a:rPr dirty="0" err="1"/>
+              <a:t>Tripsinas</a:t>
+            </a:r>
+            <a:r>
+              <a:rPr dirty="0"/>
+              <a:t>: </a:t>
+            </a:r>
+            <a:r>
+              <a:rPr dirty="0" err="1"/>
+              <a:t>enzimas</a:t>
+            </a:r>
+            <a:r>
+              <a:rPr dirty="0"/>
+              <a:t> </a:t>
+            </a:r>
+            <a:r>
+              <a:rPr dirty="0" err="1"/>
+              <a:t>centrais</a:t>
+            </a:r>
+            <a:r>
+              <a:rPr dirty="0"/>
+              <a:t> </a:t>
+            </a:r>
+            <a:r>
+              <a:rPr dirty="0" err="1"/>
+              <a:t>na</a:t>
+            </a:r>
+            <a:r>
+              <a:rPr dirty="0"/>
+              <a:t> </a:t>
+            </a:r>
+            <a:r>
+              <a:rPr dirty="0" err="1"/>
+              <a:t>digestão</a:t>
+            </a:r>
+            <a:r>
+              <a:rPr dirty="0"/>
+              <a:t> de </a:t>
+            </a:r>
+            <a:r>
+              <a:rPr dirty="0" err="1"/>
+              <a:t>proteínas</a:t>
+            </a:r>
+            <a:r>
+              <a:rPr dirty="0"/>
+              <a:t> </a:t>
+            </a:r>
+            <a:r>
+              <a:rPr dirty="0" err="1"/>
+              <a:t>em</a:t>
+            </a:r>
+            <a:r>
+              <a:rPr dirty="0"/>
+              <a:t> </a:t>
+            </a:r>
+            <a:r>
+              <a:rPr dirty="0" err="1"/>
+              <a:t>larvas</a:t>
+            </a:r>
+            <a:r>
+              <a:rPr dirty="0"/>
+              <a:t> de Lepidoptera</a:t>
             </a:r>
           </a:p>
           <a:p>
@@ -6596,8 +8967,149 @@
               </a:defRPr>
             </a:pPr>
             <a:r>
-              <a:t>Etapas: geração de backbones → design de sequência → docking → dinâmica molecular → análise integrada</a:t>
-            </a:r>
+              <a:rPr dirty="0" err="1"/>
+              <a:t>Inibidores</a:t>
+            </a:r>
+            <a:r>
+              <a:rPr dirty="0"/>
+              <a:t> de proteases = </a:t>
+            </a:r>
+            <a:r>
+              <a:rPr dirty="0" err="1"/>
+              <a:t>bloqueio</a:t>
+            </a:r>
+            <a:r>
+              <a:rPr dirty="0"/>
+              <a:t> </a:t>
+            </a:r>
+            <a:r>
+              <a:rPr dirty="0" err="1"/>
+              <a:t>direto</a:t>
+            </a:r>
+            <a:r>
+              <a:rPr dirty="0"/>
+              <a:t> da </a:t>
+            </a:r>
+            <a:r>
+              <a:rPr dirty="0" err="1"/>
+              <a:t>fisiologia</a:t>
+            </a:r>
+            <a:r>
+              <a:rPr dirty="0"/>
+              <a:t> </a:t>
+            </a:r>
+            <a:r>
+              <a:rPr dirty="0" err="1"/>
+              <a:t>digestiva</a:t>
+            </a:r>
+            <a:endParaRPr dirty="0"/>
+          </a:p>
+          <a:p>
+            <a:pPr>
+              <a:spcBef>
+                <a:spcPts val="600"/>
+              </a:spcBef>
+              <a:spcAft>
+                <a:spcPts val="600"/>
+              </a:spcAft>
+              <a:defRPr sz="1800">
+                <a:solidFill>
+                  <a:srgbClr val="404040"/>
+                </a:solidFill>
+              </a:defRPr>
+            </a:pPr>
+            <a:r>
+              <a:rPr dirty="0" err="1"/>
+              <a:t>Precedente</a:t>
+            </a:r>
+            <a:r>
+              <a:rPr dirty="0"/>
+              <a:t> natural: </a:t>
+            </a:r>
+            <a:r>
+              <a:rPr dirty="0" err="1"/>
+              <a:t>inibidores</a:t>
+            </a:r>
+            <a:r>
+              <a:rPr dirty="0"/>
+              <a:t> Kunitz/BPTI (</a:t>
+            </a:r>
+            <a:r>
+              <a:rPr dirty="0" err="1"/>
+              <a:t>comprovados</a:t>
+            </a:r>
+            <a:r>
+              <a:rPr dirty="0"/>
+              <a:t> </a:t>
+            </a:r>
+            <a:r>
+              <a:rPr dirty="0" err="1"/>
+              <a:t>em</a:t>
+            </a:r>
+            <a:r>
+              <a:rPr dirty="0"/>
+              <a:t> </a:t>
+            </a:r>
+            <a:r>
+              <a:rPr dirty="0" err="1"/>
+              <a:t>literatura</a:t>
+            </a:r>
+            <a:r>
+              <a:rPr dirty="0"/>
+              <a:t>)</a:t>
+            </a:r>
+          </a:p>
+          <a:p>
+            <a:pPr>
+              <a:spcBef>
+                <a:spcPts val="600"/>
+              </a:spcBef>
+              <a:spcAft>
+                <a:spcPts val="600"/>
+              </a:spcAft>
+              <a:defRPr sz="1800">
+                <a:solidFill>
+                  <a:srgbClr val="404040"/>
+                </a:solidFill>
+              </a:defRPr>
+            </a:pPr>
+            <a:r>
+              <a:rPr dirty="0" err="1"/>
+              <a:t>Atividade</a:t>
+            </a:r>
+            <a:r>
+              <a:rPr dirty="0"/>
+              <a:t> real </a:t>
+            </a:r>
+            <a:r>
+              <a:rPr dirty="0" err="1"/>
+              <a:t>documentada</a:t>
+            </a:r>
+            <a:r>
+              <a:rPr dirty="0"/>
+              <a:t>: </a:t>
+            </a:r>
+            <a:r>
+              <a:rPr dirty="0" err="1"/>
+              <a:t>inibição</a:t>
+            </a:r>
+            <a:r>
+              <a:rPr dirty="0"/>
+              <a:t> tight-binding + </a:t>
+            </a:r>
+            <a:r>
+              <a:rPr dirty="0" err="1"/>
+              <a:t>sinergia</a:t>
+            </a:r>
+            <a:r>
+              <a:rPr dirty="0"/>
+              <a:t> com </a:t>
+            </a:r>
+            <a:r>
+              <a:rPr dirty="0" err="1"/>
+              <a:t>Bt</a:t>
+            </a:r>
+            <a:endParaRPr dirty="0"/>
           </a:p>
         </p:txBody>
       </p:sp>
@@ -6643,6 +9155,7 @@
           <a:lstStyle/>
           <a:p>
             <a:pPr algn="ctr"/>
+            <a:endParaRPr/>
           </a:p>
         </p:txBody>
       </p:sp>
@@ -6654,8 +9167,8 @@
 </p:sld>
 </file>
 
-<file path=ppt/slides/slide6.xml><?xml version="1.0" encoding="utf-8"?>
-<p:sld xmlns:a="http://schemas.openxmlformats.org/drawingml/2006/main" xmlns:p="http://schemas.openxmlformats.org/presentationml/2006/main" xmlns:r="http://schemas.openxmlformats.org/officeDocument/2006/relationships">
+<file path=ppt/slides/slide4.xml><?xml version="1.0" encoding="utf-8"?>
+<p:sld xmlns:a="http://schemas.openxmlformats.org/drawingml/2006/main" xmlns:r="http://schemas.openxmlformats.org/officeDocument/2006/relationships" xmlns:p="http://schemas.openxmlformats.org/presentationml/2006/main">
   <p:cSld>
     <p:bg>
       <p:bgPr>
@@ -6671,7 +9184,14 @@
         <p:cNvGrpSpPr/>
         <p:nvPr/>
       </p:nvGrpSpPr>
-      <p:grpSpPr/>
+      <p:grpSpPr>
+        <a:xfrm>
+          <a:off x="0" y="0"/>
+          <a:ext cx="0" cy="0"/>
+          <a:chOff x="0" y="0"/>
+          <a:chExt cx="0" cy="0"/>
+        </a:xfrm>
+      </p:grpSpPr>
       <p:sp>
         <p:nvSpPr>
           <p:cNvPr id="2" name="TextBox 1"/>
@@ -6702,7 +9222,7 @@
               </a:defRPr>
             </a:pPr>
             <a:r>
-              <a:t>RFdiffusion &amp; ProteinMPNN — Geração de Candidatos</a:t>
+              <a:t>Lacuna do Projeto — Design Computacional de Novos Peptídeos</a:t>
             </a:r>
           </a:p>
         </p:txBody>
@@ -6715,7 +9235,7 @@
         </p:nvSpPr>
         <p:spPr>
           <a:xfrm>
-            <a:off x="640080" y="1005840"/>
+            <a:off x="640080" y="1709928"/>
             <a:ext cx="5303520" cy="4572000"/>
           </a:xfrm>
           <a:prstGeom prst="rect">
@@ -6743,8 +9263,58 @@
               </a:defRPr>
             </a:pPr>
             <a:r>
-              <a:t>**RFdiffusion** (Yang et al. 2024): geração de novo de estruturas peptídicas ancoradas ao sítio catalítico → **330 backbones reais**</a:t>
-            </a:r>
+              <a:rPr dirty="0" err="1"/>
+              <a:t>Inibidores</a:t>
+            </a:r>
+            <a:r>
+              <a:rPr dirty="0"/>
+              <a:t> </a:t>
+            </a:r>
+            <a:r>
+              <a:rPr dirty="0" err="1"/>
+              <a:t>naturais</a:t>
+            </a:r>
+            <a:r>
+              <a:rPr dirty="0"/>
+              <a:t> </a:t>
+            </a:r>
+            <a:r>
+              <a:rPr dirty="0" err="1"/>
+              <a:t>enfrentam</a:t>
+            </a:r>
+            <a:r>
+              <a:rPr dirty="0"/>
+              <a:t> </a:t>
+            </a:r>
+            <a:r>
+              <a:rPr dirty="0" err="1"/>
+              <a:t>limitações</a:t>
+            </a:r>
+            <a:r>
+              <a:rPr dirty="0"/>
+              <a:t>: </a:t>
+            </a:r>
+            <a:r>
+              <a:rPr dirty="0" err="1"/>
+              <a:t>suscetibilidade</a:t>
+            </a:r>
+            <a:r>
+              <a:rPr dirty="0"/>
+              <a:t> a </a:t>
+            </a:r>
+            <a:r>
+              <a:rPr dirty="0" err="1"/>
+              <a:t>clivagem</a:t>
+            </a:r>
+            <a:r>
+              <a:rPr dirty="0"/>
+              <a:t> </a:t>
+            </a:r>
+            <a:r>
+              <a:rPr dirty="0" err="1"/>
+              <a:t>proteolítica</a:t>
+            </a:r>
+            <a:endParaRPr dirty="0"/>
           </a:p>
           <a:p>
             <a:pPr>
@@ -6761,8 +9331,70 @@
               </a:defRPr>
             </a:pPr>
             <a:r>
-              <a:t>**ProteinMPNN** (Dauparas et al. 2023): design de sequência sobre cada backbone → **24.513 peptídeos de 20 aa** (+ variantes curtas 5–7 aa)</a:t>
-            </a:r>
+              <a:rPr dirty="0"/>
+              <a:t>IA </a:t>
+            </a:r>
+            <a:r>
+              <a:rPr dirty="0" err="1"/>
+              <a:t>generativa</a:t>
+            </a:r>
+            <a:r>
+              <a:rPr dirty="0"/>
+              <a:t> para design de </a:t>
+            </a:r>
+            <a:r>
+              <a:rPr dirty="0" err="1"/>
+              <a:t>proteínas</a:t>
+            </a:r>
+            <a:r>
+              <a:rPr dirty="0"/>
+              <a:t> </a:t>
+            </a:r>
+            <a:r>
+              <a:rPr dirty="0" err="1"/>
+              <a:t>abre</a:t>
+            </a:r>
+            <a:r>
+              <a:rPr dirty="0"/>
+              <a:t> </a:t>
+            </a:r>
+            <a:r>
+              <a:rPr dirty="0" err="1"/>
+              <a:t>alternativa</a:t>
+            </a:r>
+            <a:r>
+              <a:rPr dirty="0"/>
+              <a:t>: </a:t>
+            </a:r>
+            <a:r>
+              <a:rPr dirty="0" err="1"/>
+              <a:t>gerar</a:t>
+            </a:r>
+            <a:r>
+              <a:rPr dirty="0"/>
+              <a:t> </a:t>
+            </a:r>
+            <a:r>
+              <a:rPr dirty="0" err="1"/>
+              <a:t>peptídeos</a:t>
+            </a:r>
+            <a:r>
+              <a:rPr dirty="0"/>
+              <a:t> </a:t>
+            </a:r>
+            <a:r>
+              <a:rPr dirty="0" err="1"/>
+              <a:t>inéditos</a:t>
+            </a:r>
+            <a:r>
+              <a:rPr dirty="0"/>
+              <a:t> </a:t>
+            </a:r>
+            <a:r>
+              <a:rPr dirty="0" err="1"/>
+              <a:t>computacionalmente</a:t>
+            </a:r>
+            <a:endParaRPr dirty="0"/>
           </a:p>
           <a:p>
             <a:pPr>
@@ -6779,8 +9411,137 @@
               </a:defRPr>
             </a:pPr>
             <a:r>
-              <a:t>Filtros iniciais: compatibilidade estrutural com sítio, ausência de P1-internos óbvios</a:t>
-            </a:r>
+              <a:rPr dirty="0" err="1"/>
+              <a:t>Validação</a:t>
+            </a:r>
+            <a:r>
+              <a:rPr dirty="0"/>
+              <a:t> </a:t>
+            </a:r>
+            <a:r>
+              <a:rPr dirty="0" err="1"/>
+              <a:t>rigorosa</a:t>
+            </a:r>
+            <a:r>
+              <a:rPr dirty="0"/>
+              <a:t> in silico </a:t>
+            </a:r>
+            <a:r>
+              <a:rPr dirty="0" err="1"/>
+              <a:t>em</a:t>
+            </a:r>
+            <a:r>
+              <a:rPr dirty="0"/>
+              <a:t> </a:t>
+            </a:r>
+            <a:r>
+              <a:rPr dirty="0" err="1"/>
+              <a:t>cada</a:t>
+            </a:r>
+            <a:r>
+              <a:rPr dirty="0"/>
+              <a:t> </a:t>
+            </a:r>
+            <a:r>
+              <a:rPr dirty="0" err="1"/>
+              <a:t>etapa</a:t>
+            </a:r>
+            <a:r>
+              <a:rPr dirty="0"/>
+              <a:t> (</a:t>
+            </a:r>
+            <a:r>
+              <a:rPr dirty="0" err="1"/>
+              <a:t>não</a:t>
+            </a:r>
+            <a:r>
+              <a:rPr dirty="0"/>
+              <a:t> </a:t>
+            </a:r>
+            <a:r>
+              <a:rPr dirty="0" err="1"/>
+              <a:t>apenas</a:t>
+            </a:r>
+            <a:r>
+              <a:rPr dirty="0"/>
+              <a:t> </a:t>
+            </a:r>
+            <a:r>
+              <a:rPr dirty="0" err="1"/>
+              <a:t>escore</a:t>
+            </a:r>
+            <a:r>
+              <a:rPr dirty="0"/>
+              <a:t> </a:t>
+            </a:r>
+            <a:r>
+              <a:rPr dirty="0" err="1"/>
+              <a:t>estático</a:t>
+            </a:r>
+            <a:r>
+              <a:rPr dirty="0"/>
+              <a:t>)</a:t>
+            </a:r>
+          </a:p>
+          <a:p>
+            <a:pPr>
+              <a:spcBef>
+                <a:spcPts val="600"/>
+              </a:spcBef>
+              <a:spcAft>
+                <a:spcPts val="600"/>
+              </a:spcAft>
+              <a:defRPr sz="1800">
+                <a:solidFill>
+                  <a:srgbClr val="404040"/>
+                </a:solidFill>
+              </a:defRPr>
+            </a:pPr>
+            <a:r>
+              <a:rPr dirty="0" err="1"/>
+              <a:t>Objetivo</a:t>
+            </a:r>
+            <a:r>
+              <a:rPr dirty="0"/>
+              <a:t>: </a:t>
+            </a:r>
+            <a:r>
+              <a:rPr dirty="0" err="1"/>
+              <a:t>candidatos</a:t>
+            </a:r>
+            <a:r>
+              <a:rPr dirty="0"/>
+              <a:t> </a:t>
+            </a:r>
+            <a:r>
+              <a:rPr dirty="0" err="1"/>
+              <a:t>reprodutivelmente</a:t>
+            </a:r>
+            <a:r>
+              <a:rPr dirty="0"/>
+              <a:t> </a:t>
+            </a:r>
+            <a:r>
+              <a:rPr dirty="0" err="1"/>
+              <a:t>estáveis</a:t>
+            </a:r>
+            <a:r>
+              <a:rPr dirty="0"/>
+              <a:t> + </a:t>
+            </a:r>
+            <a:r>
+              <a:rPr dirty="0" err="1"/>
+              <a:t>específicos</a:t>
+            </a:r>
+            <a:r>
+              <a:rPr dirty="0"/>
+              <a:t> + </a:t>
+            </a:r>
+            <a:r>
+              <a:rPr dirty="0" err="1"/>
+              <a:t>resistentes</a:t>
+            </a:r>
+            <a:endParaRPr dirty="0"/>
           </a:p>
         </p:txBody>
       </p:sp>
@@ -6826,6 +9587,7 @@
           <a:lstStyle/>
           <a:p>
             <a:pPr algn="ctr"/>
+            <a:endParaRPr/>
           </a:p>
         </p:txBody>
       </p:sp>
@@ -6837,8 +9599,8 @@
 </p:sld>
 </file>
 
-<file path=ppt/slides/slide7.xml><?xml version="1.0" encoding="utf-8"?>
-<p:sld xmlns:a="http://schemas.openxmlformats.org/drawingml/2006/main" xmlns:p="http://schemas.openxmlformats.org/presentationml/2006/main" xmlns:r="http://schemas.openxmlformats.org/officeDocument/2006/relationships">
+<file path=ppt/slides/slide5.xml><?xml version="1.0" encoding="utf-8"?>
+<p:sld xmlns:a="http://schemas.openxmlformats.org/drawingml/2006/main" xmlns:r="http://schemas.openxmlformats.org/officeDocument/2006/relationships" xmlns:p="http://schemas.openxmlformats.org/presentationml/2006/main">
   <p:cSld>
     <p:bg>
       <p:bgPr>
@@ -6854,7 +9616,14 @@
         <p:cNvGrpSpPr/>
         <p:nvPr/>
       </p:nvGrpSpPr>
-      <p:grpSpPr/>
+      <p:grpSpPr>
+        <a:xfrm>
+          <a:off x="0" y="0"/>
+          <a:ext cx="0" cy="0"/>
+          <a:chOff x="0" y="0"/>
+          <a:chExt cx="0" cy="0"/>
+        </a:xfrm>
+      </p:grpSpPr>
       <p:sp>
         <p:nvSpPr>
           <p:cNvPr id="2" name="TextBox 1"/>
@@ -6885,7 +9654,7 @@
               </a:defRPr>
             </a:pPr>
             <a:r>
-              <a:t>Validação In Silico — Docking + Dinâmica Molecular</a:t>
+              <a:t>Pipeline Multiagente — Arquitetura</a:t>
             </a:r>
           </a:p>
         </p:txBody>
@@ -6926,7 +9695,7 @@
               </a:defRPr>
             </a:pPr>
             <a:r>
-              <a:t>**Docking molecular (AutoDock Vina)** → 880 poses válidas contra ACR157 (receptor primário)</a:t>
+              <a:t>10 agentes especializados orquestrando fluxo end-to-end</a:t>
             </a:r>
           </a:p>
           <a:p>
@@ -6944,43 +9713,7 @@
               </a:defRPr>
             </a:pPr>
             <a:r>
-              <a:t>**Dinâmica molecular (GROMACS, CHARMM36 + CGenFF)** → replica real n=3 (100 ns cada)</a:t>
-            </a:r>
-          </a:p>
-          <a:p>
-            <a:pPr>
-              <a:spcBef>
-                <a:spcPts val="600"/>
-              </a:spcBef>
-              <a:spcAft>
-                <a:spcPts val="600"/>
-              </a:spcAft>
-              <a:defRPr sz="1800">
-                <a:solidFill>
-                  <a:srgbClr val="404040"/>
-                </a:solidFill>
-              </a:defRPr>
-            </a:pPr>
-            <a:r>
-              <a:t>Métricas: RMSD (estabilidade estrutural), ocupância do sítio S1 (persistência funcional)</a:t>
-            </a:r>
-          </a:p>
-          <a:p>
-            <a:pPr>
-              <a:spcBef>
-                <a:spcPts val="600"/>
-              </a:spcBef>
-              <a:spcAft>
-                <a:spcPts val="600"/>
-              </a:spcAft>
-              <a:defRPr sz="1800">
-                <a:solidFill>
-                  <a:srgbClr val="404040"/>
-                </a:solidFill>
-              </a:defRPr>
-            </a:pPr>
-            <a:r>
-              <a:t>Replica-to-replica concordância como validação de reprodutibilidade</a:t>
+              <a:t>Etapas: geração de backbones → design de sequência → docking → dinâmica molecular → análise integrada</a:t>
             </a:r>
           </a:p>
         </p:txBody>
@@ -7027,6 +9760,7 @@
           <a:lstStyle/>
           <a:p>
             <a:pPr algn="ctr"/>
+            <a:endParaRPr/>
           </a:p>
         </p:txBody>
       </p:sp>
@@ -7038,8 +9772,8 @@
 </p:sld>
 </file>
 
-<file path=ppt/slides/slide8.xml><?xml version="1.0" encoding="utf-8"?>
-<p:sld xmlns:a="http://schemas.openxmlformats.org/drawingml/2006/main" xmlns:p="http://schemas.openxmlformats.org/presentationml/2006/main" xmlns:r="http://schemas.openxmlformats.org/officeDocument/2006/relationships">
+<file path=ppt/slides/slide6.xml><?xml version="1.0" encoding="utf-8"?>
+<p:sld xmlns:a="http://schemas.openxmlformats.org/drawingml/2006/main" xmlns:r="http://schemas.openxmlformats.org/officeDocument/2006/relationships" xmlns:p="http://schemas.openxmlformats.org/presentationml/2006/main">
   <p:cSld>
     <p:bg>
       <p:bgPr>
@@ -7055,7 +9789,14 @@
         <p:cNvGrpSpPr/>
         <p:nvPr/>
       </p:nvGrpSpPr>
-      <p:grpSpPr/>
+      <p:grpSpPr>
+        <a:xfrm>
+          <a:off x="0" y="0"/>
+          <a:ext cx="0" cy="0"/>
+          <a:chOff x="0" y="0"/>
+          <a:chExt cx="0" cy="0"/>
+        </a:xfrm>
+      </p:grpSpPr>
       <p:sp>
         <p:nvSpPr>
           <p:cNvPr id="2" name="TextBox 1"/>
@@ -7086,7 +9827,7 @@
               </a:defRPr>
             </a:pPr>
             <a:r>
-              <a:t>Critérios Reais — Estabilidade, Especificidade, Resistência</a:t>
+              <a:t>RFdiffusion &amp; ProteinMPNN — Geração de Candidatos</a:t>
             </a:r>
           </a:p>
         </p:txBody>
@@ -7099,7 +9840,7 @@
         </p:nvSpPr>
         <p:spPr>
           <a:xfrm>
-            <a:off x="640080" y="1005840"/>
+            <a:off x="557784" y="1691640"/>
             <a:ext cx="5303520" cy="4572000"/>
           </a:xfrm>
           <a:prstGeom prst="rect">
@@ -7127,7 +9868,72 @@
               </a:defRPr>
             </a:pPr>
             <a:r>
-              <a:t>**Estabilidade reprodutível**: RMSD &lt; 0,05 nm DP entre 3 réplicas (n=13 TOP-13)</a:t>
+              <a:rPr dirty="0"/>
+              <a:t>**</a:t>
+            </a:r>
+            <a:r>
+              <a:rPr dirty="0" err="1"/>
+              <a:t>RFdiffusion</a:t>
+            </a:r>
+            <a:r>
+              <a:rPr dirty="0"/>
+              <a:t>** (Yang et al. 2024): </a:t>
+            </a:r>
+            <a:r>
+              <a:rPr dirty="0" err="1"/>
+              <a:t>geração</a:t>
+            </a:r>
+            <a:r>
+              <a:rPr dirty="0"/>
+              <a:t> de novo de </a:t>
+            </a:r>
+            <a:r>
+              <a:rPr dirty="0" err="1"/>
+              <a:t>estruturas</a:t>
+            </a:r>
+            <a:r>
+              <a:rPr dirty="0"/>
+              <a:t> </a:t>
+            </a:r>
+            <a:r>
+              <a:rPr dirty="0" err="1"/>
+              <a:t>peptídicas</a:t>
+            </a:r>
+            <a:r>
+              <a:rPr dirty="0"/>
+              <a:t> </a:t>
+            </a:r>
+            <a:r>
+              <a:rPr dirty="0" err="1"/>
+              <a:t>ancoradas</a:t>
+            </a:r>
+            <a:r>
+              <a:rPr dirty="0"/>
+              <a:t> </a:t>
+            </a:r>
+            <a:r>
+              <a:rPr dirty="0" err="1"/>
+              <a:t>ao</a:t>
+            </a:r>
+            <a:r>
+              <a:rPr dirty="0"/>
+              <a:t> </a:t>
+            </a:r>
+            <a:r>
+              <a:rPr dirty="0" err="1"/>
+              <a:t>sítio</a:t>
+            </a:r>
+            <a:r>
+              <a:rPr dirty="0"/>
+              <a:t> </a:t>
+            </a:r>
+            <a:r>
+              <a:rPr dirty="0" err="1"/>
+              <a:t>catalítico</a:t>
+            </a:r>
+            <a:r>
+              <a:rPr dirty="0"/>
+              <a:t> → **330 backbones reais**</a:t>
             </a:r>
           </a:p>
           <a:p>
@@ -7145,7 +9951,72 @@
               </a:defRPr>
             </a:pPr>
             <a:r>
-              <a:t>**Especificidade**: Seletividade índice (SI) ≥ 2,0 kcal/mol vs. tripsina humana + *Apis mellifera* (não-alvos)</a:t>
+              <a:rPr dirty="0"/>
+              <a:t>**</a:t>
+            </a:r>
+            <a:r>
+              <a:rPr dirty="0" err="1"/>
+              <a:t>ProteinMPNN</a:t>
+            </a:r>
+            <a:r>
+              <a:rPr dirty="0"/>
+              <a:t>** (</a:t>
+            </a:r>
+            <a:r>
+              <a:rPr dirty="0" err="1"/>
+              <a:t>Dauparas</a:t>
+            </a:r>
+            <a:r>
+              <a:rPr dirty="0"/>
+              <a:t> et al. 2023): design de </a:t>
+            </a:r>
+            <a:r>
+              <a:rPr dirty="0" err="1"/>
+              <a:t>sequência</a:t>
+            </a:r>
+            <a:r>
+              <a:rPr dirty="0"/>
+              <a:t> </a:t>
+            </a:r>
+            <a:r>
+              <a:rPr dirty="0" err="1"/>
+              <a:t>sobre</a:t>
+            </a:r>
+            <a:r>
+              <a:rPr dirty="0"/>
+              <a:t> </a:t>
+            </a:r>
+            <a:r>
+              <a:rPr dirty="0" err="1"/>
+              <a:t>cada</a:t>
+            </a:r>
+            <a:r>
+              <a:rPr dirty="0"/>
+              <a:t> backbone → **24.513 </a:t>
+            </a:r>
+            <a:r>
+              <a:rPr dirty="0" err="1"/>
+              <a:t>peptídeos</a:t>
+            </a:r>
+            <a:r>
+              <a:rPr dirty="0"/>
+              <a:t> de 20 aa** (+ </a:t>
+            </a:r>
+            <a:r>
+              <a:rPr dirty="0" err="1"/>
+              <a:t>variantes</a:t>
+            </a:r>
+            <a:r>
+              <a:rPr dirty="0"/>
+              <a:t> </a:t>
+            </a:r>
+            <a:r>
+              <a:rPr dirty="0" err="1"/>
+              <a:t>curtas</a:t>
+            </a:r>
+            <a:r>
+              <a:rPr dirty="0"/>
+              <a:t> 5–7 aa)</a:t>
             </a:r>
           </a:p>
           <a:p>
@@ -7163,26 +10034,58 @@
               </a:defRPr>
             </a:pPr>
             <a:r>
-              <a:t>**Resistência proteolítica**: ausência de P1-internos básicos reconhecíveis (K/R) — proteção vs. autoclivagem</a:t>
-            </a:r>
-          </a:p>
-          <a:p>
-            <a:pPr>
-              <a:spcBef>
-                <a:spcPts val="600"/>
-              </a:spcBef>
-              <a:spcAft>
-                <a:spcPts val="600"/>
-              </a:spcAft>
-              <a:defRPr sz="1800">
-                <a:solidFill>
-                  <a:srgbClr val="404040"/>
-                </a:solidFill>
-              </a:defRPr>
-            </a:pPr>
-            <a:r>
-              <a:t>**Cross-species**: afinidade mantida contra 11 espécies-praga de Lepidoptera (amplo espectro)</a:t>
-            </a:r>
+              <a:rPr dirty="0" err="1"/>
+              <a:t>Filtros</a:t>
+            </a:r>
+            <a:r>
+              <a:rPr dirty="0"/>
+              <a:t> </a:t>
+            </a:r>
+            <a:r>
+              <a:rPr dirty="0" err="1"/>
+              <a:t>iniciais</a:t>
+            </a:r>
+            <a:r>
+              <a:rPr dirty="0"/>
+              <a:t>: </a:t>
+            </a:r>
+            <a:r>
+              <a:rPr dirty="0" err="1"/>
+              <a:t>compatibilidade</a:t>
+            </a:r>
+            <a:r>
+              <a:rPr dirty="0"/>
+              <a:t> </a:t>
+            </a:r>
+            <a:r>
+              <a:rPr dirty="0" err="1"/>
+              <a:t>estrutural</a:t>
+            </a:r>
+            <a:r>
+              <a:rPr dirty="0"/>
+              <a:t> com </a:t>
+            </a:r>
+            <a:r>
+              <a:rPr dirty="0" err="1"/>
+              <a:t>sítio</a:t>
+            </a:r>
+            <a:r>
+              <a:rPr dirty="0"/>
+              <a:t>, </a:t>
+            </a:r>
+            <a:r>
+              <a:rPr dirty="0" err="1"/>
+              <a:t>ausência</a:t>
+            </a:r>
+            <a:r>
+              <a:rPr dirty="0"/>
+              <a:t> de P1-internos </a:t>
+            </a:r>
+            <a:r>
+              <a:rPr dirty="0" err="1"/>
+              <a:t>óbvios</a:t>
+            </a:r>
+            <a:endParaRPr dirty="0"/>
           </a:p>
         </p:txBody>
       </p:sp>
@@ -7228,6 +10131,7 @@
           <a:lstStyle/>
           <a:p>
             <a:pPr algn="ctr"/>
+            <a:endParaRPr/>
           </a:p>
         </p:txBody>
       </p:sp>
@@ -7239,8 +10143,8 @@
 </p:sld>
 </file>
 
-<file path=ppt/slides/slide9.xml><?xml version="1.0" encoding="utf-8"?>
-<p:sld xmlns:a="http://schemas.openxmlformats.org/drawingml/2006/main" xmlns:p="http://schemas.openxmlformats.org/presentationml/2006/main" xmlns:r="http://schemas.openxmlformats.org/officeDocument/2006/relationships">
+<file path=ppt/slides/slide7.xml><?xml version="1.0" encoding="utf-8"?>
+<p:sld xmlns:a="http://schemas.openxmlformats.org/drawingml/2006/main" xmlns:r="http://schemas.openxmlformats.org/officeDocument/2006/relationships" xmlns:p="http://schemas.openxmlformats.org/presentationml/2006/main">
   <p:cSld>
     <p:bg>
       <p:bgPr>
@@ -7256,7 +10160,14 @@
         <p:cNvGrpSpPr/>
         <p:nvPr/>
       </p:nvGrpSpPr>
-      <p:grpSpPr/>
+      <p:grpSpPr>
+        <a:xfrm>
+          <a:off x="0" y="0"/>
+          <a:ext cx="0" cy="0"/>
+          <a:chOff x="0" y="0"/>
+          <a:chExt cx="0" cy="0"/>
+        </a:xfrm>
+      </p:grpSpPr>
       <p:sp>
         <p:nvSpPr>
           <p:cNvPr id="2" name="TextBox 1"/>
@@ -7287,7 +10198,7 @@
               </a:defRPr>
             </a:pPr>
             <a:r>
-              <a:t>Estruturas-Alvo &amp; Sítio Catalítico</a:t>
+              <a:t>Validação In Silico — Docking + Dinâmica Molecular</a:t>
             </a:r>
           </a:p>
         </p:txBody>
@@ -7300,7 +10211,7 @@
         </p:nvSpPr>
         <p:spPr>
           <a:xfrm>
-            <a:off x="640080" y="1005840"/>
+            <a:off x="640080" y="1847088"/>
             <a:ext cx="5303520" cy="4572000"/>
           </a:xfrm>
           <a:prstGeom prst="rect">
@@ -7328,7 +10239,32 @@
               </a:defRPr>
             </a:pPr>
             <a:r>
-              <a:t>**4 receptores primários**: ACR157, QCL936, XP273, XP352 (tripsinas de Lepidoptera)</a:t>
+              <a:rPr dirty="0"/>
+              <a:t>**Docking molecular (</a:t>
+            </a:r>
+            <a:r>
+              <a:rPr dirty="0" err="1"/>
+              <a:t>AutoDock</a:t>
+            </a:r>
+            <a:r>
+              <a:rPr dirty="0"/>
+              <a:t> Vina)** → 880 poses </a:t>
+            </a:r>
+            <a:r>
+              <a:rPr dirty="0" err="1"/>
+              <a:t>válidas</a:t>
+            </a:r>
+            <a:r>
+              <a:rPr dirty="0"/>
+              <a:t> contra ACR157 (receptor </a:t>
+            </a:r>
+            <a:r>
+              <a:rPr dirty="0" err="1"/>
+              <a:t>primário</a:t>
+            </a:r>
+            <a:r>
+              <a:rPr dirty="0"/>
+              <a:t>)</a:t>
             </a:r>
           </a:p>
           <a:p>
@@ -7346,7 +10282,32 @@
               </a:defRPr>
             </a:pPr>
             <a:r>
-              <a:t>Tríade catalítica conservada: His–Asp–Ser (posição única em todos, verificada)</a:t>
+              <a:rPr dirty="0"/>
+              <a:t>**</a:t>
+            </a:r>
+            <a:r>
+              <a:rPr dirty="0" err="1"/>
+              <a:t>Dinâmica</a:t>
+            </a:r>
+            <a:r>
+              <a:rPr dirty="0"/>
+              <a:t> molecular (GROMACS, CHARMM36 + </a:t>
+            </a:r>
+            <a:r>
+              <a:rPr dirty="0" err="1"/>
+              <a:t>CGenFF</a:t>
+            </a:r>
+            <a:r>
+              <a:rPr dirty="0"/>
+              <a:t>)** → replica real n=3 (100 ns </a:t>
+            </a:r>
+            <a:r>
+              <a:rPr dirty="0" err="1"/>
+              <a:t>cada</a:t>
+            </a:r>
+            <a:r>
+              <a:rPr dirty="0"/>
+              <a:t>)</a:t>
             </a:r>
           </a:p>
           <a:p>
@@ -7364,8 +10325,109 @@
               </a:defRPr>
             </a:pPr>
             <a:r>
-              <a:t>Bolso de especificidade S1: resíduo Asp em 3 receptores (XP273: Tyr atípico, documentado)</a:t>
-            </a:r>
+              <a:rPr dirty="0" err="1"/>
+              <a:t>Métricas</a:t>
+            </a:r>
+            <a:r>
+              <a:rPr dirty="0"/>
+              <a:t>: RMSD (</a:t>
+            </a:r>
+            <a:r>
+              <a:rPr dirty="0" err="1"/>
+              <a:t>estabilidade</a:t>
+            </a:r>
+            <a:r>
+              <a:rPr dirty="0"/>
+              <a:t> </a:t>
+            </a:r>
+            <a:r>
+              <a:rPr dirty="0" err="1"/>
+              <a:t>estrutural</a:t>
+            </a:r>
+            <a:r>
+              <a:rPr dirty="0"/>
+              <a:t>), </a:t>
+            </a:r>
+            <a:r>
+              <a:rPr dirty="0" err="1"/>
+              <a:t>ocupância</a:t>
+            </a:r>
+            <a:r>
+              <a:rPr dirty="0"/>
+              <a:t> do </a:t>
+            </a:r>
+            <a:r>
+              <a:rPr dirty="0" err="1"/>
+              <a:t>sítio</a:t>
+            </a:r>
+            <a:r>
+              <a:rPr dirty="0"/>
+              <a:t> S1 (</a:t>
+            </a:r>
+            <a:r>
+              <a:rPr dirty="0" err="1"/>
+              <a:t>persistência</a:t>
+            </a:r>
+            <a:r>
+              <a:rPr dirty="0"/>
+              <a:t> </a:t>
+            </a:r>
+            <a:r>
+              <a:rPr dirty="0" err="1"/>
+              <a:t>funcional</a:t>
+            </a:r>
+            <a:r>
+              <a:rPr dirty="0"/>
+              <a:t>)</a:t>
+            </a:r>
+          </a:p>
+          <a:p>
+            <a:pPr>
+              <a:spcBef>
+                <a:spcPts val="600"/>
+              </a:spcBef>
+              <a:spcAft>
+                <a:spcPts val="600"/>
+              </a:spcAft>
+              <a:defRPr sz="1800">
+                <a:solidFill>
+                  <a:srgbClr val="404040"/>
+                </a:solidFill>
+              </a:defRPr>
+            </a:pPr>
+            <a:r>
+              <a:rPr dirty="0"/>
+              <a:t>Replica-to-replica </a:t>
+            </a:r>
+            <a:r>
+              <a:rPr dirty="0" err="1"/>
+              <a:t>concordância</a:t>
+            </a:r>
+            <a:r>
+              <a:rPr dirty="0"/>
+              <a:t> </a:t>
+            </a:r>
+            <a:r>
+              <a:rPr dirty="0" err="1"/>
+              <a:t>como</a:t>
+            </a:r>
+            <a:r>
+              <a:rPr dirty="0"/>
+              <a:t> </a:t>
+            </a:r>
+            <a:r>
+              <a:rPr dirty="0" err="1"/>
+              <a:t>validação</a:t>
+            </a:r>
+            <a:r>
+              <a:rPr dirty="0"/>
+              <a:t> de </a:t>
+            </a:r>
+            <a:r>
+              <a:rPr dirty="0" err="1"/>
+              <a:t>reprodutibilidade</a:t>
+            </a:r>
+            <a:endParaRPr dirty="0"/>
           </a:p>
         </p:txBody>
       </p:sp>
@@ -7411,6 +10473,707 @@
           <a:lstStyle/>
           <a:p>
             <a:pPr algn="ctr"/>
+            <a:endParaRPr/>
+          </a:p>
+        </p:txBody>
+      </p:sp>
+    </p:spTree>
+  </p:cSld>
+  <p:clrMapOvr>
+    <a:masterClrMapping/>
+  </p:clrMapOvr>
+</p:sld>
+</file>
+
+<file path=ppt/slides/slide8.xml><?xml version="1.0" encoding="utf-8"?>
+<p:sld xmlns:a="http://schemas.openxmlformats.org/drawingml/2006/main" xmlns:r="http://schemas.openxmlformats.org/officeDocument/2006/relationships" xmlns:p="http://schemas.openxmlformats.org/presentationml/2006/main">
+  <p:cSld>
+    <p:bg>
+      <p:bgPr>
+        <a:solidFill>
+          <a:srgbClr val="FFFFFF"/>
+        </a:solidFill>
+        <a:effectLst/>
+      </p:bgPr>
+    </p:bg>
+    <p:spTree>
+      <p:nvGrpSpPr>
+        <p:cNvPr id="1" name=""/>
+        <p:cNvGrpSpPr/>
+        <p:nvPr/>
+      </p:nvGrpSpPr>
+      <p:grpSpPr>
+        <a:xfrm>
+          <a:off x="0" y="0"/>
+          <a:ext cx="0" cy="0"/>
+          <a:chOff x="0" y="0"/>
+          <a:chExt cx="0" cy="0"/>
+        </a:xfrm>
+      </p:grpSpPr>
+      <p:sp>
+        <p:nvSpPr>
+          <p:cNvPr id="2" name="TextBox 1"/>
+          <p:cNvSpPr txBox="1"/>
+          <p:nvPr/>
+        </p:nvSpPr>
+        <p:spPr>
+          <a:xfrm>
+            <a:off x="457200" y="274320"/>
+            <a:ext cx="8229600" cy="548640"/>
+          </a:xfrm>
+          <a:prstGeom prst="rect">
+            <a:avLst/>
+          </a:prstGeom>
+          <a:noFill/>
+        </p:spPr>
+        <p:txBody>
+          <a:bodyPr wrap="square">
+            <a:spAutoFit/>
+          </a:bodyPr>
+          <a:lstStyle/>
+          <a:p>
+            <a:pPr>
+              <a:defRPr sz="4000" b="1">
+                <a:solidFill>
+                  <a:srgbClr val="003366"/>
+                </a:solidFill>
+              </a:defRPr>
+            </a:pPr>
+            <a:r>
+              <a:t>Critérios Reais — Estabilidade, Especificidade, Resistência</a:t>
+            </a:r>
+          </a:p>
+        </p:txBody>
+      </p:sp>
+      <p:sp>
+        <p:nvSpPr>
+          <p:cNvPr id="3" name="TextBox 2"/>
+          <p:cNvSpPr txBox="1"/>
+          <p:nvPr/>
+        </p:nvSpPr>
+        <p:spPr>
+          <a:xfrm>
+            <a:off x="566928" y="1664208"/>
+            <a:ext cx="5303520" cy="4572000"/>
+          </a:xfrm>
+          <a:prstGeom prst="rect">
+            <a:avLst/>
+          </a:prstGeom>
+          <a:noFill/>
+        </p:spPr>
+        <p:txBody>
+          <a:bodyPr wrap="square">
+            <a:spAutoFit/>
+          </a:bodyPr>
+          <a:lstStyle/>
+          <a:p>
+            <a:pPr>
+              <a:spcBef>
+                <a:spcPts val="600"/>
+              </a:spcBef>
+              <a:spcAft>
+                <a:spcPts val="600"/>
+              </a:spcAft>
+              <a:defRPr sz="1800">
+                <a:solidFill>
+                  <a:srgbClr val="404040"/>
+                </a:solidFill>
+              </a:defRPr>
+            </a:pPr>
+            <a:r>
+              <a:rPr dirty="0"/>
+              <a:t>**</a:t>
+            </a:r>
+            <a:r>
+              <a:rPr dirty="0" err="1"/>
+              <a:t>Estabilidade</a:t>
+            </a:r>
+            <a:r>
+              <a:rPr dirty="0"/>
+              <a:t> </a:t>
+            </a:r>
+            <a:r>
+              <a:rPr dirty="0" err="1"/>
+              <a:t>reprodutível</a:t>
+            </a:r>
+            <a:r>
+              <a:rPr dirty="0"/>
+              <a:t>**: RMSD &lt; 0,05 nm DP entre 3 </a:t>
+            </a:r>
+            <a:r>
+              <a:rPr dirty="0" err="1"/>
+              <a:t>réplicas</a:t>
+            </a:r>
+            <a:r>
+              <a:rPr dirty="0"/>
+              <a:t> (n=13 TOP-13)</a:t>
+            </a:r>
+          </a:p>
+          <a:p>
+            <a:pPr>
+              <a:spcBef>
+                <a:spcPts val="600"/>
+              </a:spcBef>
+              <a:spcAft>
+                <a:spcPts val="600"/>
+              </a:spcAft>
+              <a:defRPr sz="1800">
+                <a:solidFill>
+                  <a:srgbClr val="404040"/>
+                </a:solidFill>
+              </a:defRPr>
+            </a:pPr>
+            <a:r>
+              <a:rPr dirty="0"/>
+              <a:t>**</a:t>
+            </a:r>
+            <a:r>
+              <a:rPr dirty="0" err="1"/>
+              <a:t>Especificidade</a:t>
+            </a:r>
+            <a:r>
+              <a:rPr dirty="0"/>
+              <a:t>**: </a:t>
+            </a:r>
+            <a:r>
+              <a:rPr dirty="0" err="1"/>
+              <a:t>Seletividade</a:t>
+            </a:r>
+            <a:r>
+              <a:rPr dirty="0"/>
+              <a:t> </a:t>
+            </a:r>
+            <a:r>
+              <a:rPr dirty="0" err="1"/>
+              <a:t>índice</a:t>
+            </a:r>
+            <a:r>
+              <a:rPr dirty="0"/>
+              <a:t> (SI) ≥ 2,0 kcal/mol vs. </a:t>
+            </a:r>
+            <a:r>
+              <a:rPr dirty="0" err="1"/>
+              <a:t>tripsina</a:t>
+            </a:r>
+            <a:r>
+              <a:rPr dirty="0"/>
+              <a:t> humana + *Apis mellifera* (</a:t>
+            </a:r>
+            <a:r>
+              <a:rPr dirty="0" err="1"/>
+              <a:t>não-alvos</a:t>
+            </a:r>
+            <a:r>
+              <a:rPr dirty="0"/>
+              <a:t>)</a:t>
+            </a:r>
+          </a:p>
+          <a:p>
+            <a:pPr>
+              <a:spcBef>
+                <a:spcPts val="600"/>
+              </a:spcBef>
+              <a:spcAft>
+                <a:spcPts val="600"/>
+              </a:spcAft>
+              <a:defRPr sz="1800">
+                <a:solidFill>
+                  <a:srgbClr val="404040"/>
+                </a:solidFill>
+              </a:defRPr>
+            </a:pPr>
+            <a:r>
+              <a:rPr dirty="0"/>
+              <a:t>**</a:t>
+            </a:r>
+            <a:r>
+              <a:rPr dirty="0" err="1"/>
+              <a:t>Resistência</a:t>
+            </a:r>
+            <a:r>
+              <a:rPr dirty="0"/>
+              <a:t> </a:t>
+            </a:r>
+            <a:r>
+              <a:rPr dirty="0" err="1"/>
+              <a:t>proteolítica</a:t>
+            </a:r>
+            <a:r>
+              <a:rPr dirty="0"/>
+              <a:t>**: </a:t>
+            </a:r>
+            <a:r>
+              <a:rPr dirty="0" err="1"/>
+              <a:t>ausência</a:t>
+            </a:r>
+            <a:r>
+              <a:rPr dirty="0"/>
+              <a:t> de P1-internos </a:t>
+            </a:r>
+            <a:r>
+              <a:rPr dirty="0" err="1"/>
+              <a:t>básicos</a:t>
+            </a:r>
+            <a:r>
+              <a:rPr dirty="0"/>
+              <a:t> </a:t>
+            </a:r>
+            <a:r>
+              <a:rPr dirty="0" err="1"/>
+              <a:t>reconhecíveis</a:t>
+            </a:r>
+            <a:r>
+              <a:rPr dirty="0"/>
+              <a:t> (K/R) — </a:t>
+            </a:r>
+            <a:r>
+              <a:rPr dirty="0" err="1"/>
+              <a:t>proteção</a:t>
+            </a:r>
+            <a:r>
+              <a:rPr dirty="0"/>
+              <a:t> vs. </a:t>
+            </a:r>
+            <a:r>
+              <a:rPr dirty="0" err="1"/>
+              <a:t>autoclivagem</a:t>
+            </a:r>
+            <a:endParaRPr dirty="0"/>
+          </a:p>
+          <a:p>
+            <a:pPr>
+              <a:spcBef>
+                <a:spcPts val="600"/>
+              </a:spcBef>
+              <a:spcAft>
+                <a:spcPts val="600"/>
+              </a:spcAft>
+              <a:defRPr sz="1800">
+                <a:solidFill>
+                  <a:srgbClr val="404040"/>
+                </a:solidFill>
+              </a:defRPr>
+            </a:pPr>
+            <a:r>
+              <a:rPr dirty="0"/>
+              <a:t>**Cross-species**: </a:t>
+            </a:r>
+            <a:r>
+              <a:rPr dirty="0" err="1"/>
+              <a:t>afinidade</a:t>
+            </a:r>
+            <a:r>
+              <a:rPr dirty="0"/>
+              <a:t> </a:t>
+            </a:r>
+            <a:r>
+              <a:rPr dirty="0" err="1"/>
+              <a:t>mantida</a:t>
+            </a:r>
+            <a:r>
+              <a:rPr dirty="0"/>
+              <a:t> contra 11 </a:t>
+            </a:r>
+            <a:r>
+              <a:rPr dirty="0" err="1"/>
+              <a:t>espécies-praga</a:t>
+            </a:r>
+            <a:r>
+              <a:rPr dirty="0"/>
+              <a:t> de Lepidoptera (</a:t>
+            </a:r>
+            <a:r>
+              <a:rPr dirty="0" err="1"/>
+              <a:t>amplo</a:t>
+            </a:r>
+            <a:r>
+              <a:rPr dirty="0"/>
+              <a:t> </a:t>
+            </a:r>
+            <a:r>
+              <a:rPr dirty="0" err="1"/>
+              <a:t>espectro</a:t>
+            </a:r>
+            <a:r>
+              <a:rPr dirty="0"/>
+              <a:t>)</a:t>
+            </a:r>
+          </a:p>
+        </p:txBody>
+      </p:sp>
+      <p:sp>
+        <p:nvSpPr>
+          <p:cNvPr id="4" name="Rectangle 3"/>
+          <p:cNvSpPr/>
+          <p:nvPr/>
+        </p:nvSpPr>
+        <p:spPr>
+          <a:xfrm>
+            <a:off x="6217920" y="1005840"/>
+            <a:ext cx="2468880" cy="4572000"/>
+          </a:xfrm>
+          <a:prstGeom prst="rect">
+            <a:avLst/>
+          </a:prstGeom>
+          <a:solidFill>
+            <a:srgbClr val="E6E6E6"/>
+          </a:solidFill>
+          <a:ln>
+            <a:solidFill>
+              <a:srgbClr val="C8C8C8"/>
+            </a:solidFill>
+          </a:ln>
+        </p:spPr>
+        <p:style>
+          <a:lnRef idx="1">
+            <a:schemeClr val="accent1"/>
+          </a:lnRef>
+          <a:fillRef idx="3">
+            <a:schemeClr val="accent1"/>
+          </a:fillRef>
+          <a:effectRef idx="2">
+            <a:schemeClr val="accent1"/>
+          </a:effectRef>
+          <a:fontRef idx="minor">
+            <a:schemeClr val="lt1"/>
+          </a:fontRef>
+        </p:style>
+        <p:txBody>
+          <a:bodyPr rtlCol="0" anchor="ctr"/>
+          <a:lstStyle/>
+          <a:p>
+            <a:pPr algn="ctr"/>
+            <a:endParaRPr/>
+          </a:p>
+        </p:txBody>
+      </p:sp>
+    </p:spTree>
+  </p:cSld>
+  <p:clrMapOvr>
+    <a:masterClrMapping/>
+  </p:clrMapOvr>
+</p:sld>
+</file>
+
+<file path=ppt/slides/slide9.xml><?xml version="1.0" encoding="utf-8"?>
+<p:sld xmlns:a="http://schemas.openxmlformats.org/drawingml/2006/main" xmlns:r="http://schemas.openxmlformats.org/officeDocument/2006/relationships" xmlns:p="http://schemas.openxmlformats.org/presentationml/2006/main">
+  <p:cSld>
+    <p:bg>
+      <p:bgPr>
+        <a:solidFill>
+          <a:srgbClr val="FFFFFF"/>
+        </a:solidFill>
+        <a:effectLst/>
+      </p:bgPr>
+    </p:bg>
+    <p:spTree>
+      <p:nvGrpSpPr>
+        <p:cNvPr id="1" name=""/>
+        <p:cNvGrpSpPr/>
+        <p:nvPr/>
+      </p:nvGrpSpPr>
+      <p:grpSpPr>
+        <a:xfrm>
+          <a:off x="0" y="0"/>
+          <a:ext cx="0" cy="0"/>
+          <a:chOff x="0" y="0"/>
+          <a:chExt cx="0" cy="0"/>
+        </a:xfrm>
+      </p:grpSpPr>
+      <p:sp>
+        <p:nvSpPr>
+          <p:cNvPr id="2" name="TextBox 1"/>
+          <p:cNvSpPr txBox="1"/>
+          <p:nvPr/>
+        </p:nvSpPr>
+        <p:spPr>
+          <a:xfrm>
+            <a:off x="457200" y="274320"/>
+            <a:ext cx="8229600" cy="548640"/>
+          </a:xfrm>
+          <a:prstGeom prst="rect">
+            <a:avLst/>
+          </a:prstGeom>
+          <a:noFill/>
+        </p:spPr>
+        <p:txBody>
+          <a:bodyPr wrap="square">
+            <a:spAutoFit/>
+          </a:bodyPr>
+          <a:lstStyle/>
+          <a:p>
+            <a:pPr>
+              <a:defRPr sz="4000" b="1">
+                <a:solidFill>
+                  <a:srgbClr val="003366"/>
+                </a:solidFill>
+              </a:defRPr>
+            </a:pPr>
+            <a:r>
+              <a:t>Estruturas-Alvo &amp; Sítio Catalítico</a:t>
+            </a:r>
+          </a:p>
+        </p:txBody>
+      </p:sp>
+      <p:sp>
+        <p:nvSpPr>
+          <p:cNvPr id="3" name="TextBox 2"/>
+          <p:cNvSpPr txBox="1"/>
+          <p:nvPr/>
+        </p:nvSpPr>
+        <p:spPr>
+          <a:xfrm>
+            <a:off x="566928" y="1472184"/>
+            <a:ext cx="5303520" cy="4572000"/>
+          </a:xfrm>
+          <a:prstGeom prst="rect">
+            <a:avLst/>
+          </a:prstGeom>
+          <a:noFill/>
+        </p:spPr>
+        <p:txBody>
+          <a:bodyPr wrap="square">
+            <a:spAutoFit/>
+          </a:bodyPr>
+          <a:lstStyle/>
+          <a:p>
+            <a:pPr>
+              <a:spcBef>
+                <a:spcPts val="600"/>
+              </a:spcBef>
+              <a:spcAft>
+                <a:spcPts val="600"/>
+              </a:spcAft>
+              <a:defRPr sz="1800">
+                <a:solidFill>
+                  <a:srgbClr val="404040"/>
+                </a:solidFill>
+              </a:defRPr>
+            </a:pPr>
+            <a:r>
+              <a:rPr dirty="0"/>
+              <a:t>**4 </a:t>
+            </a:r>
+            <a:r>
+              <a:rPr dirty="0" err="1"/>
+              <a:t>receptores</a:t>
+            </a:r>
+            <a:r>
+              <a:rPr dirty="0"/>
+              <a:t> </a:t>
+            </a:r>
+            <a:r>
+              <a:rPr dirty="0" err="1"/>
+              <a:t>primários</a:t>
+            </a:r>
+            <a:r>
+              <a:rPr dirty="0"/>
+              <a:t>**: ACR157, QCL936, XP273, XP352 (</a:t>
+            </a:r>
+            <a:r>
+              <a:rPr dirty="0" err="1"/>
+              <a:t>tripsinas</a:t>
+            </a:r>
+            <a:r>
+              <a:rPr dirty="0"/>
+              <a:t> de Lepidoptera)</a:t>
+            </a:r>
+          </a:p>
+          <a:p>
+            <a:pPr>
+              <a:spcBef>
+                <a:spcPts val="600"/>
+              </a:spcBef>
+              <a:spcAft>
+                <a:spcPts val="600"/>
+              </a:spcAft>
+              <a:defRPr sz="1800">
+                <a:solidFill>
+                  <a:srgbClr val="404040"/>
+                </a:solidFill>
+              </a:defRPr>
+            </a:pPr>
+            <a:r>
+              <a:rPr dirty="0" err="1"/>
+              <a:t>Tríade</a:t>
+            </a:r>
+            <a:r>
+              <a:rPr dirty="0"/>
+              <a:t> </a:t>
+            </a:r>
+            <a:r>
+              <a:rPr dirty="0" err="1"/>
+              <a:t>catalítica</a:t>
+            </a:r>
+            <a:r>
+              <a:rPr dirty="0"/>
+              <a:t> </a:t>
+            </a:r>
+            <a:r>
+              <a:rPr dirty="0" err="1"/>
+              <a:t>conservada</a:t>
+            </a:r>
+            <a:r>
+              <a:rPr dirty="0"/>
+              <a:t>: His–Asp–Ser (</a:t>
+            </a:r>
+            <a:r>
+              <a:rPr dirty="0" err="1"/>
+              <a:t>posição</a:t>
+            </a:r>
+            <a:r>
+              <a:rPr dirty="0"/>
+              <a:t> </a:t>
+            </a:r>
+            <a:r>
+              <a:rPr dirty="0" err="1"/>
+              <a:t>única</a:t>
+            </a:r>
+            <a:r>
+              <a:rPr dirty="0"/>
+              <a:t> </a:t>
+            </a:r>
+            <a:r>
+              <a:rPr dirty="0" err="1"/>
+              <a:t>em</a:t>
+            </a:r>
+            <a:r>
+              <a:rPr dirty="0"/>
+              <a:t> </a:t>
+            </a:r>
+            <a:r>
+              <a:rPr dirty="0" err="1"/>
+              <a:t>todos</a:t>
+            </a:r>
+            <a:r>
+              <a:rPr dirty="0"/>
+              <a:t>, </a:t>
+            </a:r>
+            <a:r>
+              <a:rPr dirty="0" err="1"/>
+              <a:t>verificada</a:t>
+            </a:r>
+            <a:r>
+              <a:rPr dirty="0"/>
+              <a:t>)</a:t>
+            </a:r>
+          </a:p>
+          <a:p>
+            <a:pPr>
+              <a:spcBef>
+                <a:spcPts val="600"/>
+              </a:spcBef>
+              <a:spcAft>
+                <a:spcPts val="600"/>
+              </a:spcAft>
+              <a:defRPr sz="1800">
+                <a:solidFill>
+                  <a:srgbClr val="404040"/>
+                </a:solidFill>
+              </a:defRPr>
+            </a:pPr>
+            <a:r>
+              <a:rPr dirty="0" err="1"/>
+              <a:t>Bolso</a:t>
+            </a:r>
+            <a:r>
+              <a:rPr dirty="0"/>
+              <a:t> de </a:t>
+            </a:r>
+            <a:r>
+              <a:rPr dirty="0" err="1"/>
+              <a:t>especificidade</a:t>
+            </a:r>
+            <a:r>
+              <a:rPr dirty="0"/>
+              <a:t> S1: </a:t>
+            </a:r>
+            <a:r>
+              <a:rPr dirty="0" err="1"/>
+              <a:t>resíduo</a:t>
+            </a:r>
+            <a:r>
+              <a:rPr dirty="0"/>
+              <a:t> Asp </a:t>
+            </a:r>
+            <a:r>
+              <a:rPr dirty="0" err="1"/>
+              <a:t>em</a:t>
+            </a:r>
+            <a:r>
+              <a:rPr dirty="0"/>
+              <a:t> 3 </a:t>
+            </a:r>
+            <a:r>
+              <a:rPr dirty="0" err="1"/>
+              <a:t>receptores</a:t>
+            </a:r>
+            <a:r>
+              <a:rPr dirty="0"/>
+              <a:t> (XP273: Tyr </a:t>
+            </a:r>
+            <a:r>
+              <a:rPr dirty="0" err="1"/>
+              <a:t>atípico</a:t>
+            </a:r>
+            <a:r>
+              <a:rPr dirty="0"/>
+              <a:t>, </a:t>
+            </a:r>
+            <a:r>
+              <a:rPr dirty="0" err="1"/>
+              <a:t>documentado</a:t>
+            </a:r>
+            <a:r>
+              <a:rPr dirty="0"/>
+              <a:t>)</a:t>
+            </a:r>
+          </a:p>
+        </p:txBody>
+      </p:sp>
+      <p:sp>
+        <p:nvSpPr>
+          <p:cNvPr id="4" name="Rectangle 3"/>
+          <p:cNvSpPr/>
+          <p:nvPr/>
+        </p:nvSpPr>
+        <p:spPr>
+          <a:xfrm>
+            <a:off x="6217920" y="1005840"/>
+            <a:ext cx="2468880" cy="4572000"/>
+          </a:xfrm>
+          <a:prstGeom prst="rect">
+            <a:avLst/>
+          </a:prstGeom>
+          <a:solidFill>
+            <a:srgbClr val="E6E6E6"/>
+          </a:solidFill>
+          <a:ln>
+            <a:solidFill>
+              <a:srgbClr val="C8C8C8"/>
+            </a:solidFill>
+          </a:ln>
+        </p:spPr>
+        <p:style>
+          <a:lnRef idx="1">
+            <a:schemeClr val="accent1"/>
+          </a:lnRef>
+          <a:fillRef idx="3">
+            <a:schemeClr val="accent1"/>
+          </a:fillRef>
+          <a:effectRef idx="2">
+            <a:schemeClr val="accent1"/>
+          </a:effectRef>
+          <a:fontRef idx="minor">
+            <a:schemeClr val="lt1"/>
+          </a:fontRef>
+        </p:style>
+        <p:txBody>
+          <a:bodyPr rtlCol="0" anchor="ctr"/>
+          <a:lstStyle/>
+          <a:p>
+            <a:pPr algn="ctr"/>
+            <a:endParaRPr/>
           </a:p>
         </p:txBody>
       </p:sp>
